--- a/app/templates/colegio_de_profesores_del_peru/plantilla_programa_de_especializacion.pptx
+++ b/app/templates/colegio_de_profesores_del_peru/plantilla_programa_de_especializacion.pptx
@@ -116,7 +116,7 @@
 <file path=ppt/revisionInfo.xml><?xml version="1.0" encoding="utf-8"?>
 <p1510:revInfo xmlns:a="http://schemas.openxmlformats.org/drawingml/2006/main" xmlns:r="http://schemas.openxmlformats.org/officeDocument/2006/relationships" xmlns:p1510="http://schemas.microsoft.com/office/powerpoint/2015/10/main">
   <p1510:revLst>
-    <p1510:client id="{81BE734B-175E-4949-887B-DE36A53E665C}" v="61" dt="2025-09-05T23:13:14.055"/>
+    <p1510:client id="{5A886DD1-82C5-4CB0-918F-19E79CD9ADF3}" v="4" dt="2026-03-05T19:06:16.771"/>
   </p1510:revLst>
 </p1510:revInfo>
 </file>
@@ -124,107 +124,171 @@
 <file path=ppt/changesInfos/changesInfo1.xml><?xml version="1.0" encoding="utf-8"?>
 <pc:chgInfo xmlns:a="http://schemas.openxmlformats.org/drawingml/2006/main" xmlns:r="http://schemas.openxmlformats.org/officeDocument/2006/relationships" xmlns:ac="http://schemas.microsoft.com/office/drawing/2013/main/command" xmlns:pc="http://schemas.microsoft.com/office/powerpoint/2013/main/command">
   <pc:docChgLst>
-    <pc:chgData name="Benjamín de Jesús Cueva Niño de Guzmán" userId="56da303013910523" providerId="LiveId" clId="{81BE734B-175E-4949-887B-DE36A53E665C}"/>
-    <pc:docChg chg="undo custSel addSld delSld modSld">
-      <pc:chgData name="Benjamín de Jesús Cueva Niño de Guzmán" userId="56da303013910523" providerId="LiveId" clId="{81BE734B-175E-4949-887B-DE36A53E665C}" dt="2025-09-05T23:13:14.778" v="781" actId="478"/>
+    <pc:chgData name="Benjamín de Jesús Cueva Niño de Guzmán" userId="56da303013910523" providerId="LiveId" clId="{532B7A48-8887-4F62-9537-0BA1FAE83637}"/>
+    <pc:docChg chg="custSel modSld">
+      <pc:chgData name="Benjamín de Jesús Cueva Niño de Guzmán" userId="56da303013910523" providerId="LiveId" clId="{532B7A48-8887-4F62-9537-0BA1FAE83637}" dt="2026-03-05T19:06:16.771" v="112"/>
       <pc:docMkLst>
         <pc:docMk/>
       </pc:docMkLst>
       <pc:sldChg chg="addSp delSp modSp mod">
-        <pc:chgData name="Benjamín de Jesús Cueva Niño de Guzmán" userId="56da303013910523" providerId="LiveId" clId="{81BE734B-175E-4949-887B-DE36A53E665C}" dt="2025-09-05T23:13:14.778" v="781" actId="478"/>
+        <pc:chgData name="Benjamín de Jesús Cueva Niño de Guzmán" userId="56da303013910523" providerId="LiveId" clId="{532B7A48-8887-4F62-9537-0BA1FAE83637}" dt="2026-03-04T23:48:19.752" v="106" actId="20577"/>
         <pc:sldMkLst>
           <pc:docMk/>
           <pc:sldMk cId="3047749852" sldId="264"/>
         </pc:sldMkLst>
         <pc:spChg chg="add mod">
-          <ac:chgData name="Benjamín de Jesús Cueva Niño de Guzmán" userId="56da303013910523" providerId="LiveId" clId="{81BE734B-175E-4949-887B-DE36A53E665C}" dt="2025-09-01T23:23:02.407" v="495"/>
+          <ac:chgData name="Benjamín de Jesús Cueva Niño de Guzmán" userId="56da303013910523" providerId="LiveId" clId="{532B7A48-8887-4F62-9537-0BA1FAE83637}" dt="2026-03-04T23:47:52.265" v="33" actId="1036"/>
           <ac:spMkLst>
             <pc:docMk/>
             <pc:sldMk cId="3047749852" sldId="264"/>
-            <ac:spMk id="4" creationId="{74525A67-AF69-5405-4E77-CC1CA582A767}"/>
+            <ac:spMk id="14" creationId="{C787EE22-1719-D2C1-C135-6FF4DE3533BE}"/>
           </ac:spMkLst>
         </pc:spChg>
-        <pc:spChg chg="mod">
-          <ac:chgData name="Benjamín de Jesús Cueva Niño de Guzmán" userId="56da303013910523" providerId="LiveId" clId="{81BE734B-175E-4949-887B-DE36A53E665C}" dt="2025-09-01T23:23:15.286" v="521" actId="1035"/>
+        <pc:spChg chg="del">
+          <ac:chgData name="Benjamín de Jesús Cueva Niño de Guzmán" userId="56da303013910523" providerId="LiveId" clId="{532B7A48-8887-4F62-9537-0BA1FAE83637}" dt="2026-03-04T23:47:33.174" v="12" actId="478"/>
           <ac:spMkLst>
             <pc:docMk/>
             <pc:sldMk cId="3047749852" sldId="264"/>
             <ac:spMk id="15" creationId="{00000000-0000-0000-0000-000000000000}"/>
           </ac:spMkLst>
         </pc:spChg>
-        <pc:spChg chg="mod">
-          <ac:chgData name="Benjamín de Jesús Cueva Niño de Guzmán" userId="56da303013910523" providerId="LiveId" clId="{81BE734B-175E-4949-887B-DE36A53E665C}" dt="2025-09-02T13:31:00.019" v="740" actId="20577"/>
+        <pc:spChg chg="del">
+          <ac:chgData name="Benjamín de Jesús Cueva Niño de Guzmán" userId="56da303013910523" providerId="LiveId" clId="{532B7A48-8887-4F62-9537-0BA1FAE83637}" dt="2026-03-04T23:47:35.545" v="13" actId="478"/>
           <ac:spMkLst>
             <pc:docMk/>
             <pc:sldMk cId="3047749852" sldId="264"/>
             <ac:spMk id="16" creationId="{00000000-0000-0000-0000-000000000000}"/>
           </ac:spMkLst>
         </pc:spChg>
-        <pc:spChg chg="mod">
-          <ac:chgData name="Benjamín de Jesús Cueva Niño de Guzmán" userId="56da303013910523" providerId="LiveId" clId="{81BE734B-175E-4949-887B-DE36A53E665C}" dt="2025-09-01T23:25:03.867" v="678"/>
+        <pc:spChg chg="del mod">
+          <ac:chgData name="Benjamín de Jesús Cueva Niño de Guzmán" userId="56da303013910523" providerId="LiveId" clId="{532B7A48-8887-4F62-9537-0BA1FAE83637}" dt="2026-03-04T23:47:33.174" v="12" actId="478"/>
           <ac:spMkLst>
             <pc:docMk/>
             <pc:sldMk cId="3047749852" sldId="264"/>
             <ac:spMk id="17" creationId="{00000000-0000-0000-0000-000000000000}"/>
           </ac:spMkLst>
         </pc:spChg>
-        <pc:spChg chg="mod">
-          <ac:chgData name="Benjamín de Jesús Cueva Niño de Guzmán" userId="56da303013910523" providerId="LiveId" clId="{81BE734B-175E-4949-887B-DE36A53E665C}" dt="2025-09-02T13:26:36.055" v="690" actId="1035"/>
+        <pc:spChg chg="del">
+          <ac:chgData name="Benjamín de Jesús Cueva Niño de Guzmán" userId="56da303013910523" providerId="LiveId" clId="{532B7A48-8887-4F62-9537-0BA1FAE83637}" dt="2026-03-04T23:47:33.174" v="12" actId="478"/>
           <ac:spMkLst>
             <pc:docMk/>
             <pc:sldMk cId="3047749852" sldId="264"/>
             <ac:spMk id="18" creationId="{00000000-0000-0000-0000-000000000000}"/>
           </ac:spMkLst>
         </pc:spChg>
-        <pc:picChg chg="add del">
-          <ac:chgData name="Benjamín de Jesús Cueva Niño de Guzmán" userId="56da303013910523" providerId="LiveId" clId="{81BE734B-175E-4949-887B-DE36A53E665C}" dt="2025-09-05T23:13:14.624" v="780" actId="478"/>
-          <ac:picMkLst>
+        <pc:spChg chg="add mod">
+          <ac:chgData name="Benjamín de Jesús Cueva Niño de Guzmán" userId="56da303013910523" providerId="LiveId" clId="{532B7A48-8887-4F62-9537-0BA1FAE83637}" dt="2026-03-04T23:47:52.265" v="33" actId="1036"/>
+          <ac:spMkLst>
             <pc:docMk/>
             <pc:sldMk cId="3047749852" sldId="264"/>
-            <ac:picMk id="20" creationId="{2A58D08C-5987-F518-DED7-3FFEAE982996}"/>
-          </ac:picMkLst>
-        </pc:picChg>
-        <pc:picChg chg="add del">
-          <ac:chgData name="Benjamín de Jesús Cueva Niño de Guzmán" userId="56da303013910523" providerId="LiveId" clId="{81BE734B-175E-4949-887B-DE36A53E665C}" dt="2025-09-05T23:13:14.778" v="781" actId="478"/>
-          <ac:picMkLst>
+            <ac:spMk id="19" creationId="{9D131566-3CE7-C75F-AE7E-FD10C25DD5D6}"/>
+          </ac:spMkLst>
+        </pc:spChg>
+        <pc:spChg chg="add mod">
+          <ac:chgData name="Benjamín de Jesús Cueva Niño de Guzmán" userId="56da303013910523" providerId="LiveId" clId="{532B7A48-8887-4F62-9537-0BA1FAE83637}" dt="2026-03-04T23:48:19.752" v="106" actId="20577"/>
+          <ac:spMkLst>
             <pc:docMk/>
             <pc:sldMk cId="3047749852" sldId="264"/>
-            <ac:picMk id="21" creationId="{2134BA70-53C9-CA9E-7E80-5BC479ADAB4D}"/>
-          </ac:picMkLst>
-        </pc:picChg>
+            <ac:spMk id="22" creationId="{4F5FC0C4-11CB-05EB-6EC2-967E2ACEEC3C}"/>
+          </ac:spMkLst>
+        </pc:spChg>
       </pc:sldChg>
       <pc:sldChg chg="addSp delSp modSp mod">
-        <pc:chgData name="Benjamín de Jesús Cueva Niño de Guzmán" userId="56da303013910523" providerId="LiveId" clId="{81BE734B-175E-4949-887B-DE36A53E665C}" dt="2025-09-05T23:13:14.192" v="777" actId="478"/>
+        <pc:chgData name="Benjamín de Jesús Cueva Niño de Guzmán" userId="56da303013910523" providerId="LiveId" clId="{532B7A48-8887-4F62-9537-0BA1FAE83637}" dt="2026-03-05T19:06:16.771" v="112"/>
         <pc:sldMkLst>
           <pc:docMk/>
           <pc:sldMk cId="1210459346" sldId="265"/>
         </pc:sldMkLst>
-        <pc:graphicFrameChg chg="mod modGraphic">
-          <ac:chgData name="Benjamín de Jesús Cueva Niño de Guzmán" userId="56da303013910523" providerId="LiveId" clId="{81BE734B-175E-4949-887B-DE36A53E665C}" dt="2025-09-02T13:26:38.147" v="691"/>
+        <pc:spChg chg="add mod">
+          <ac:chgData name="Benjamín de Jesús Cueva Niño de Guzmán" userId="56da303013910523" providerId="LiveId" clId="{532B7A48-8887-4F62-9537-0BA1FAE83637}" dt="2026-03-05T19:06:16.771" v="112"/>
+          <ac:spMkLst>
+            <pc:docMk/>
+            <pc:sldMk cId="1210459346" sldId="265"/>
+            <ac:spMk id="2" creationId="{203C07B9-9B5A-A44E-7071-61CDFCCF4674}"/>
+          </ac:spMkLst>
+        </pc:spChg>
+        <pc:spChg chg="del">
+          <ac:chgData name="Benjamín de Jesús Cueva Niño de Guzmán" userId="56da303013910523" providerId="LiveId" clId="{532B7A48-8887-4F62-9537-0BA1FAE83637}" dt="2026-03-04T23:48:35.952" v="107" actId="478"/>
+          <ac:spMkLst>
+            <pc:docMk/>
+            <pc:sldMk cId="1210459346" sldId="265"/>
+            <ac:spMk id="2" creationId="{759F48FB-FD35-13D0-18BC-30EB95AF4351}"/>
+          </ac:spMkLst>
+        </pc:spChg>
+        <pc:spChg chg="mod">
+          <ac:chgData name="Benjamín de Jesús Cueva Niño de Guzmán" userId="56da303013910523" providerId="LiveId" clId="{532B7A48-8887-4F62-9537-0BA1FAE83637}" dt="2026-03-02T15:14:00.848" v="2"/>
+          <ac:spMkLst>
+            <pc:docMk/>
+            <pc:sldMk cId="1210459346" sldId="265"/>
+            <ac:spMk id="4" creationId="{9E7B3D0B-95C0-C766-86DE-08454CE74898}"/>
+          </ac:spMkLst>
+        </pc:spChg>
+        <pc:spChg chg="mod">
+          <ac:chgData name="Benjamín de Jesús Cueva Niño de Guzmán" userId="56da303013910523" providerId="LiveId" clId="{532B7A48-8887-4F62-9537-0BA1FAE83637}" dt="2026-03-02T15:14:00.848" v="2"/>
+          <ac:spMkLst>
+            <pc:docMk/>
+            <pc:sldMk cId="1210459346" sldId="265"/>
+            <ac:spMk id="5" creationId="{1EF057FA-8464-54BE-CE7F-16748780A949}"/>
+          </ac:spMkLst>
+        </pc:spChg>
+        <pc:spChg chg="add del mod">
+          <ac:chgData name="Benjamín de Jesús Cueva Niño de Guzmán" userId="56da303013910523" providerId="LiveId" clId="{532B7A48-8887-4F62-9537-0BA1FAE83637}" dt="2026-03-05T19:06:14.442" v="111" actId="478"/>
+          <ac:spMkLst>
+            <pc:docMk/>
+            <pc:sldMk cId="1210459346" sldId="265"/>
+            <ac:spMk id="7" creationId="{45F085C9-8075-9BCE-C55D-12CBD3A49805}"/>
+          </ac:spMkLst>
+        </pc:spChg>
+        <pc:spChg chg="add mod">
+          <ac:chgData name="Benjamín de Jesús Cueva Niño de Guzmán" userId="56da303013910523" providerId="LiveId" clId="{532B7A48-8887-4F62-9537-0BA1FAE83637}" dt="2026-03-04T23:48:36.295" v="108"/>
+          <ac:spMkLst>
+            <pc:docMk/>
+            <pc:sldMk cId="1210459346" sldId="265"/>
+            <ac:spMk id="11" creationId="{F5C7B1FD-AB74-C6FD-CB78-2EFDC3461E8B}"/>
+          </ac:spMkLst>
+        </pc:spChg>
+        <pc:grpChg chg="add mod">
+          <ac:chgData name="Benjamín de Jesús Cueva Niño de Guzmán" userId="56da303013910523" providerId="LiveId" clId="{532B7A48-8887-4F62-9537-0BA1FAE83637}" dt="2026-03-02T15:14:00.848" v="2"/>
+          <ac:grpSpMkLst>
+            <pc:docMk/>
+            <pc:sldMk cId="1210459346" sldId="265"/>
+            <ac:grpSpMk id="3" creationId="{7ECAD10F-1D94-C9A0-EDA3-4FD687F3ECA3}"/>
+          </ac:grpSpMkLst>
+        </pc:grpChg>
+        <pc:graphicFrameChg chg="add mod">
+          <ac:chgData name="Benjamín de Jesús Cueva Niño de Guzmán" userId="56da303013910523" providerId="LiveId" clId="{532B7A48-8887-4F62-9537-0BA1FAE83637}" dt="2026-03-04T23:48:36.295" v="108"/>
+          <ac:graphicFrameMkLst>
+            <pc:docMk/>
+            <pc:sldMk cId="1210459346" sldId="265"/>
+            <ac:graphicFrameMk id="8" creationId="{8B361D77-35F6-FD8F-5B47-CD50BE4C1CFE}"/>
+          </ac:graphicFrameMkLst>
+        </pc:graphicFrameChg>
+        <pc:graphicFrameChg chg="add mod">
+          <ac:chgData name="Benjamín de Jesús Cueva Niño de Guzmán" userId="56da303013910523" providerId="LiveId" clId="{532B7A48-8887-4F62-9537-0BA1FAE83637}" dt="2026-03-04T23:48:36.295" v="108"/>
+          <ac:graphicFrameMkLst>
+            <pc:docMk/>
+            <pc:sldMk cId="1210459346" sldId="265"/>
+            <ac:graphicFrameMk id="9" creationId="{EDB9D92F-92B8-9EED-FB21-E81EFD45D745}"/>
+          </ac:graphicFrameMkLst>
+        </pc:graphicFrameChg>
+        <pc:graphicFrameChg chg="del">
+          <ac:chgData name="Benjamín de Jesús Cueva Niño de Guzmán" userId="56da303013910523" providerId="LiveId" clId="{532B7A48-8887-4F62-9537-0BA1FAE83637}" dt="2026-03-04T23:48:35.952" v="107" actId="478"/>
           <ac:graphicFrameMkLst>
             <pc:docMk/>
             <pc:sldMk cId="1210459346" sldId="265"/>
             <ac:graphicFrameMk id="20" creationId="{00000000-0000-0000-0000-000000000000}"/>
           </ac:graphicFrameMkLst>
         </pc:graphicFrameChg>
-        <pc:graphicFrameChg chg="mod modGraphic">
-          <ac:chgData name="Benjamín de Jesús Cueva Niño de Guzmán" userId="56da303013910523" providerId="LiveId" clId="{81BE734B-175E-4949-887B-DE36A53E665C}" dt="2025-09-01T23:16:28.080" v="151"/>
+        <pc:graphicFrameChg chg="del">
+          <ac:chgData name="Benjamín de Jesús Cueva Niño de Guzmán" userId="56da303013910523" providerId="LiveId" clId="{532B7A48-8887-4F62-9537-0BA1FAE83637}" dt="2026-03-04T23:48:35.952" v="107" actId="478"/>
           <ac:graphicFrameMkLst>
             <pc:docMk/>
             <pc:sldMk cId="1210459346" sldId="265"/>
             <ac:graphicFrameMk id="21" creationId="{00000000-0000-0000-0000-000000000000}"/>
           </ac:graphicFrameMkLst>
         </pc:graphicFrameChg>
-        <pc:graphicFrameChg chg="mod">
-          <ac:chgData name="Benjamín de Jesús Cueva Niño de Guzmán" userId="56da303013910523" providerId="LiveId" clId="{81BE734B-175E-4949-887B-DE36A53E665C}" dt="2025-09-01T23:16:16.716" v="146" actId="1038"/>
-          <ac:graphicFrameMkLst>
-            <pc:docMk/>
-            <pc:sldMk cId="1210459346" sldId="265"/>
-            <ac:graphicFrameMk id="24" creationId="{00000000-0000-0000-0000-000000000000}"/>
-          </ac:graphicFrameMkLst>
-        </pc:graphicFrameChg>
-        <pc:graphicFrameChg chg="mod modGraphic">
-          <ac:chgData name="Benjamín de Jesús Cueva Niño de Guzmán" userId="56da303013910523" providerId="LiveId" clId="{81BE734B-175E-4949-887B-DE36A53E665C}" dt="2025-09-01T23:17:18.948" v="195" actId="122"/>
+        <pc:graphicFrameChg chg="modGraphic">
+          <ac:chgData name="Benjamín de Jesús Cueva Niño de Guzmán" userId="56da303013910523" providerId="LiveId" clId="{532B7A48-8887-4F62-9537-0BA1FAE83637}" dt="2026-03-04T23:48:52.391" v="110" actId="255"/>
           <ac:graphicFrameMkLst>
             <pc:docMk/>
             <pc:sldMk cId="1210459346" sldId="265"/>
@@ -232,187 +296,21 @@
           </ac:graphicFrameMkLst>
         </pc:graphicFrameChg>
         <pc:picChg chg="add mod">
-          <ac:chgData name="Benjamín de Jesús Cueva Niño de Guzmán" userId="56da303013910523" providerId="LiveId" clId="{81BE734B-175E-4949-887B-DE36A53E665C}" dt="2025-09-02T13:32:18.335" v="754" actId="1076"/>
+          <ac:chgData name="Benjamín de Jesús Cueva Niño de Guzmán" userId="56da303013910523" providerId="LiveId" clId="{532B7A48-8887-4F62-9537-0BA1FAE83637}" dt="2026-03-04T23:48:36.295" v="108"/>
           <ac:picMkLst>
             <pc:docMk/>
             <pc:sldMk cId="1210459346" sldId="265"/>
-            <ac:picMk id="4" creationId="{F4B535D0-0164-58E0-2E57-1648D6378573}"/>
+            <ac:picMk id="10" creationId="{5CF40D62-F177-89A5-FD52-D995DC3A704F}"/>
           </ac:picMkLst>
         </pc:picChg>
-        <pc:picChg chg="add del mod">
-          <ac:chgData name="Benjamín de Jesús Cueva Niño de Guzmán" userId="56da303013910523" providerId="LiveId" clId="{81BE734B-175E-4949-887B-DE36A53E665C}" dt="2025-09-05T23:13:14.192" v="777" actId="478"/>
+        <pc:picChg chg="del">
+          <ac:chgData name="Benjamín de Jesús Cueva Niño de Guzmán" userId="56da303013910523" providerId="LiveId" clId="{532B7A48-8887-4F62-9537-0BA1FAE83637}" dt="2026-03-04T23:48:35.952" v="107" actId="478"/>
           <ac:picMkLst>
             <pc:docMk/>
             <pc:sldMk cId="1210459346" sldId="265"/>
             <ac:picMk id="13" creationId="{00000000-0000-0000-0000-000000000000}"/>
           </ac:picMkLst>
         </pc:picChg>
-        <pc:picChg chg="mod">
-          <ac:chgData name="Benjamín de Jesús Cueva Niño de Guzmán" userId="56da303013910523" providerId="LiveId" clId="{81BE734B-175E-4949-887B-DE36A53E665C}" dt="2025-09-02T13:27:25.923" v="697" actId="1076"/>
-          <ac:picMkLst>
-            <pc:docMk/>
-            <pc:sldMk cId="1210459346" sldId="265"/>
-            <ac:picMk id="27" creationId="{00000000-0000-0000-0000-000000000000}"/>
-          </ac:picMkLst>
-        </pc:picChg>
-      </pc:sldChg>
-      <pc:sldChg chg="del">
-        <pc:chgData name="Benjamín de Jesús Cueva Niño de Guzmán" userId="56da303013910523" providerId="LiveId" clId="{81BE734B-175E-4949-887B-DE36A53E665C}" dt="2025-09-01T23:13:13.048" v="0" actId="47"/>
-        <pc:sldMkLst>
-          <pc:docMk/>
-          <pc:sldMk cId="136797201" sldId="266"/>
-        </pc:sldMkLst>
-      </pc:sldChg>
-      <pc:sldChg chg="addSp delSp modSp add mod">
-        <pc:chgData name="Benjamín de Jesús Cueva Niño de Guzmán" userId="56da303013910523" providerId="LiveId" clId="{81BE734B-175E-4949-887B-DE36A53E665C}" dt="2025-09-05T23:13:14.472" v="779" actId="478"/>
-        <pc:sldMkLst>
-          <pc:docMk/>
-          <pc:sldMk cId="2824078373" sldId="266"/>
-        </pc:sldMkLst>
-        <pc:spChg chg="mod">
-          <ac:chgData name="Benjamín de Jesús Cueva Niño de Guzmán" userId="56da303013910523" providerId="LiveId" clId="{81BE734B-175E-4949-887B-DE36A53E665C}" dt="2025-09-01T23:23:54.241" v="561" actId="1035"/>
-          <ac:spMkLst>
-            <pc:docMk/>
-            <pc:sldMk cId="2824078373" sldId="266"/>
-            <ac:spMk id="15" creationId="{E0096FB5-860F-A1B6-F6DC-015BB10A06C0}"/>
-          </ac:spMkLst>
-        </pc:spChg>
-        <pc:spChg chg="mod">
-          <ac:chgData name="Benjamín de Jesús Cueva Niño de Guzmán" userId="56da303013910523" providerId="LiveId" clId="{81BE734B-175E-4949-887B-DE36A53E665C}" dt="2025-09-02T13:31:18.351" v="746"/>
-          <ac:spMkLst>
-            <pc:docMk/>
-            <pc:sldMk cId="2824078373" sldId="266"/>
-            <ac:spMk id="16" creationId="{A7E3FDD8-36CA-AE11-8BF6-5EA22534F62A}"/>
-          </ac:spMkLst>
-        </pc:spChg>
-        <pc:spChg chg="mod">
-          <ac:chgData name="Benjamín de Jesús Cueva Niño de Guzmán" userId="56da303013910523" providerId="LiveId" clId="{81BE734B-175E-4949-887B-DE36A53E665C}" dt="2025-09-01T23:24:13.409" v="619" actId="20577"/>
-          <ac:spMkLst>
-            <pc:docMk/>
-            <pc:sldMk cId="2824078373" sldId="266"/>
-            <ac:spMk id="17" creationId="{08CC2EC1-C051-087D-5F4D-7202243E3C93}"/>
-          </ac:spMkLst>
-        </pc:spChg>
-        <pc:spChg chg="mod">
-          <ac:chgData name="Benjamín de Jesús Cueva Niño de Guzmán" userId="56da303013910523" providerId="LiveId" clId="{81BE734B-175E-4949-887B-DE36A53E665C}" dt="2025-09-01T23:24:17.144" v="633" actId="1036"/>
-          <ac:spMkLst>
-            <pc:docMk/>
-            <pc:sldMk cId="2824078373" sldId="266"/>
-            <ac:spMk id="18" creationId="{2D24FE71-E861-136A-0A2E-628FAADCD772}"/>
-          </ac:spMkLst>
-        </pc:spChg>
-        <pc:spChg chg="add mod">
-          <ac:chgData name="Benjamín de Jesús Cueva Niño de Guzmán" userId="56da303013910523" providerId="LiveId" clId="{81BE734B-175E-4949-887B-DE36A53E665C}" dt="2025-09-01T23:23:44.388" v="556"/>
-          <ac:spMkLst>
-            <pc:docMk/>
-            <pc:sldMk cId="2824078373" sldId="266"/>
-            <ac:spMk id="24" creationId="{FEA49039-B15E-0C33-FE6A-26C7305C74AA}"/>
-          </ac:spMkLst>
-        </pc:spChg>
-        <pc:picChg chg="add del">
-          <ac:chgData name="Benjamín de Jesús Cueva Niño de Guzmán" userId="56da303013910523" providerId="LiveId" clId="{81BE734B-175E-4949-887B-DE36A53E665C}" dt="2025-09-05T23:13:14.338" v="778" actId="478"/>
-          <ac:picMkLst>
-            <pc:docMk/>
-            <pc:sldMk cId="2824078373" sldId="266"/>
-            <ac:picMk id="20" creationId="{1B67DCAC-1D82-3AEC-3923-A66B5161A352}"/>
-          </ac:picMkLst>
-        </pc:picChg>
-        <pc:picChg chg="add del">
-          <ac:chgData name="Benjamín de Jesús Cueva Niño de Guzmán" userId="56da303013910523" providerId="LiveId" clId="{81BE734B-175E-4949-887B-DE36A53E665C}" dt="2025-09-05T23:13:14.472" v="779" actId="478"/>
-          <ac:picMkLst>
-            <pc:docMk/>
-            <pc:sldMk cId="2824078373" sldId="266"/>
-            <ac:picMk id="21" creationId="{AC199AA7-BE5C-9314-4BB3-530785571951}"/>
-          </ac:picMkLst>
-        </pc:picChg>
-      </pc:sldChg>
-      <pc:sldChg chg="add del">
-        <pc:chgData name="Benjamín de Jesús Cueva Niño de Guzmán" userId="56da303013910523" providerId="LiveId" clId="{81BE734B-175E-4949-887B-DE36A53E665C}" dt="2025-09-01T23:16:36.470" v="152" actId="47"/>
-        <pc:sldMkLst>
-          <pc:docMk/>
-          <pc:sldMk cId="3999635151" sldId="266"/>
-        </pc:sldMkLst>
-      </pc:sldChg>
-      <pc:sldChg chg="addSp delSp modSp add mod replId">
-        <pc:chgData name="Benjamín de Jesús Cueva Niño de Guzmán" userId="56da303013910523" providerId="LiveId" clId="{81BE734B-175E-4949-887B-DE36A53E665C}" dt="2025-09-05T23:13:14.055" v="776"/>
-        <pc:sldMkLst>
-          <pc:docMk/>
-          <pc:sldMk cId="407129367" sldId="267"/>
-        </pc:sldMkLst>
-        <pc:graphicFrameChg chg="mod modGraphic">
-          <ac:chgData name="Benjamín de Jesús Cueva Niño de Guzmán" userId="56da303013910523" providerId="LiveId" clId="{81BE734B-175E-4949-887B-DE36A53E665C}" dt="2025-09-01T23:21:53.294" v="472"/>
-          <ac:graphicFrameMkLst>
-            <pc:docMk/>
-            <pc:sldMk cId="407129367" sldId="267"/>
-            <ac:graphicFrameMk id="20" creationId="{0AF9A10E-E93D-8B30-8C66-BC784649E173}"/>
-          </ac:graphicFrameMkLst>
-        </pc:graphicFrameChg>
-        <pc:graphicFrameChg chg="mod modGraphic">
-          <ac:chgData name="Benjamín de Jesús Cueva Niño de Guzmán" userId="56da303013910523" providerId="LiveId" clId="{81BE734B-175E-4949-887B-DE36A53E665C}" dt="2025-09-01T23:18:00.910" v="253" actId="122"/>
-          <ac:graphicFrameMkLst>
-            <pc:docMk/>
-            <pc:sldMk cId="407129367" sldId="267"/>
-            <ac:graphicFrameMk id="29" creationId="{F06752CA-B3D8-A837-C9D4-0624E3242F80}"/>
-          </ac:graphicFrameMkLst>
-        </pc:graphicFrameChg>
-        <pc:picChg chg="add mod">
-          <ac:chgData name="Benjamín de Jesús Cueva Niño de Guzmán" userId="56da303013910523" providerId="LiveId" clId="{81BE734B-175E-4949-887B-DE36A53E665C}" dt="2025-09-02T13:32:46.096" v="761" actId="1076"/>
-          <ac:picMkLst>
-            <pc:docMk/>
-            <pc:sldMk cId="407129367" sldId="267"/>
-            <ac:picMk id="4" creationId="{E07C9B79-9C24-4880-2C1E-2C34DE08C050}"/>
-          </ac:picMkLst>
-        </pc:picChg>
-        <pc:picChg chg="add del">
-          <ac:chgData name="Benjamín de Jesús Cueva Niño de Guzmán" userId="56da303013910523" providerId="LiveId" clId="{81BE734B-175E-4949-887B-DE36A53E665C}" dt="2025-09-05T23:13:14.055" v="776"/>
-          <ac:picMkLst>
-            <pc:docMk/>
-            <pc:sldMk cId="407129367" sldId="267"/>
-            <ac:picMk id="13" creationId="{60AB5FCD-E2F7-40E7-7790-6B69042A8DFF}"/>
-          </ac:picMkLst>
-        </pc:picChg>
-      </pc:sldChg>
-      <pc:sldChg chg="add del replId">
-        <pc:chgData name="Benjamín de Jesús Cueva Niño de Guzmán" userId="56da303013910523" providerId="LiveId" clId="{81BE734B-175E-4949-887B-DE36A53E665C}" dt="2025-09-01T23:16:36.936" v="153" actId="47"/>
-        <pc:sldMkLst>
-          <pc:docMk/>
-          <pc:sldMk cId="609386926" sldId="267"/>
-        </pc:sldMkLst>
-      </pc:sldChg>
-      <pc:sldChg chg="del">
-        <pc:chgData name="Benjamín de Jesús Cueva Niño de Guzmán" userId="56da303013910523" providerId="LiveId" clId="{81BE734B-175E-4949-887B-DE36A53E665C}" dt="2025-09-01T23:13:13.176" v="1" actId="47"/>
-        <pc:sldMkLst>
-          <pc:docMk/>
-          <pc:sldMk cId="1715549381" sldId="267"/>
-        </pc:sldMkLst>
-      </pc:sldChg>
-      <pc:sldChg chg="modSp add del mod">
-        <pc:chgData name="Benjamín de Jesús Cueva Niño de Guzmán" userId="56da303013910523" providerId="LiveId" clId="{81BE734B-175E-4949-887B-DE36A53E665C}" dt="2025-09-02T15:37:03.750" v="767" actId="47"/>
-        <pc:sldMkLst>
-          <pc:docMk/>
-          <pc:sldMk cId="1010132214" sldId="268"/>
-        </pc:sldMkLst>
-      </pc:sldChg>
-      <pc:sldChg chg="del">
-        <pc:chgData name="Benjamín de Jesús Cueva Niño de Guzmán" userId="56da303013910523" providerId="LiveId" clId="{81BE734B-175E-4949-887B-DE36A53E665C}" dt="2025-09-01T23:13:13.663" v="2" actId="47"/>
-        <pc:sldMkLst>
-          <pc:docMk/>
-          <pc:sldMk cId="2494600391" sldId="268"/>
-        </pc:sldMkLst>
-      </pc:sldChg>
-      <pc:sldChg chg="del">
-        <pc:chgData name="Benjamín de Jesús Cueva Niño de Guzmán" userId="56da303013910523" providerId="LiveId" clId="{81BE734B-175E-4949-887B-DE36A53E665C}" dt="2025-09-01T23:13:14.024" v="3" actId="47"/>
-        <pc:sldMkLst>
-          <pc:docMk/>
-          <pc:sldMk cId="460508146" sldId="269"/>
-        </pc:sldMkLst>
-      </pc:sldChg>
-      <pc:sldChg chg="addSp delSp modSp add del mod replId">
-        <pc:chgData name="Benjamín de Jesús Cueva Niño de Guzmán" userId="56da303013910523" providerId="LiveId" clId="{81BE734B-175E-4949-887B-DE36A53E665C}" dt="2025-09-02T15:37:03.998" v="768" actId="47"/>
-        <pc:sldMkLst>
-          <pc:docMk/>
-          <pc:sldMk cId="1301361189" sldId="269"/>
-        </pc:sldMkLst>
       </pc:sldChg>
     </pc:docChg>
   </pc:docChgLst>
@@ -550,7 +448,7 @@
           <a:p>
             <a:fld id="{6B5BCF65-E86E-467A-B19A-9BBB66F1E598}" type="datetimeFigureOut">
               <a:rPr lang="es-PE" smtClean="0"/>
-              <a:t>14/02/2026</a:t>
+              <a:t>5/03/2026</a:t>
             </a:fld>
             <a:endParaRPr lang="es-PE"/>
           </a:p>
@@ -720,7 +618,7 @@
           <a:p>
             <a:fld id="{6B5BCF65-E86E-467A-B19A-9BBB66F1E598}" type="datetimeFigureOut">
               <a:rPr lang="es-PE" smtClean="0"/>
-              <a:t>14/02/2026</a:t>
+              <a:t>5/03/2026</a:t>
             </a:fld>
             <a:endParaRPr lang="es-PE"/>
           </a:p>
@@ -900,7 +798,7 @@
           <a:p>
             <a:fld id="{6B5BCF65-E86E-467A-B19A-9BBB66F1E598}" type="datetimeFigureOut">
               <a:rPr lang="es-PE" smtClean="0"/>
-              <a:t>14/02/2026</a:t>
+              <a:t>5/03/2026</a:t>
             </a:fld>
             <a:endParaRPr lang="es-PE"/>
           </a:p>
@@ -1070,7 +968,7 @@
           <a:p>
             <a:fld id="{6B5BCF65-E86E-467A-B19A-9BBB66F1E598}" type="datetimeFigureOut">
               <a:rPr lang="es-PE" smtClean="0"/>
-              <a:t>14/02/2026</a:t>
+              <a:t>5/03/2026</a:t>
             </a:fld>
             <a:endParaRPr lang="es-PE"/>
           </a:p>
@@ -1314,7 +1212,7 @@
           <a:p>
             <a:fld id="{6B5BCF65-E86E-467A-B19A-9BBB66F1E598}" type="datetimeFigureOut">
               <a:rPr lang="es-PE" smtClean="0"/>
-              <a:t>14/02/2026</a:t>
+              <a:t>5/03/2026</a:t>
             </a:fld>
             <a:endParaRPr lang="es-PE"/>
           </a:p>
@@ -1546,7 +1444,7 @@
           <a:p>
             <a:fld id="{6B5BCF65-E86E-467A-B19A-9BBB66F1E598}" type="datetimeFigureOut">
               <a:rPr lang="es-PE" smtClean="0"/>
-              <a:t>14/02/2026</a:t>
+              <a:t>5/03/2026</a:t>
             </a:fld>
             <a:endParaRPr lang="es-PE"/>
           </a:p>
@@ -1913,7 +1811,7 @@
           <a:p>
             <a:fld id="{6B5BCF65-E86E-467A-B19A-9BBB66F1E598}" type="datetimeFigureOut">
               <a:rPr lang="es-PE" smtClean="0"/>
-              <a:t>14/02/2026</a:t>
+              <a:t>5/03/2026</a:t>
             </a:fld>
             <a:endParaRPr lang="es-PE"/>
           </a:p>
@@ -2031,7 +1929,7 @@
           <a:p>
             <a:fld id="{6B5BCF65-E86E-467A-B19A-9BBB66F1E598}" type="datetimeFigureOut">
               <a:rPr lang="es-PE" smtClean="0"/>
-              <a:t>14/02/2026</a:t>
+              <a:t>5/03/2026</a:t>
             </a:fld>
             <a:endParaRPr lang="es-PE"/>
           </a:p>
@@ -2126,7 +2024,7 @@
           <a:p>
             <a:fld id="{6B5BCF65-E86E-467A-B19A-9BBB66F1E598}" type="datetimeFigureOut">
               <a:rPr lang="es-PE" smtClean="0"/>
-              <a:t>14/02/2026</a:t>
+              <a:t>5/03/2026</a:t>
             </a:fld>
             <a:endParaRPr lang="es-PE"/>
           </a:p>
@@ -2403,7 +2301,7 @@
           <a:p>
             <a:fld id="{6B5BCF65-E86E-467A-B19A-9BBB66F1E598}" type="datetimeFigureOut">
               <a:rPr lang="es-PE" smtClean="0"/>
-              <a:t>14/02/2026</a:t>
+              <a:t>5/03/2026</a:t>
             </a:fld>
             <a:endParaRPr lang="es-PE"/>
           </a:p>
@@ -2660,7 +2558,7 @@
           <a:p>
             <a:fld id="{6B5BCF65-E86E-467A-B19A-9BBB66F1E598}" type="datetimeFigureOut">
               <a:rPr lang="es-PE" smtClean="0"/>
-              <a:t>14/02/2026</a:t>
+              <a:t>5/03/2026</a:t>
             </a:fld>
             <a:endParaRPr lang="es-PE"/>
           </a:p>
@@ -2873,7 +2771,7 @@
           <a:p>
             <a:fld id="{6B5BCF65-E86E-467A-B19A-9BBB66F1E598}" type="datetimeFigureOut">
               <a:rPr lang="es-PE" smtClean="0"/>
-              <a:t>14/02/2026</a:t>
+              <a:t>5/03/2026</a:t>
             </a:fld>
             <a:endParaRPr lang="es-PE"/>
           </a:p>
@@ -3376,186 +3274,6 @@
       </p:pic>
       <p:sp>
         <p:nvSpPr>
-          <p:cNvPr id="15" name="CuadroTexto 14"/>
-          <p:cNvSpPr txBox="1"/>
-          <p:nvPr/>
-        </p:nvSpPr>
-        <p:spPr>
-          <a:xfrm>
-            <a:off x="4252904" y="1667480"/>
-            <a:ext cx="1400192" cy="369332"/>
-          </a:xfrm>
-          <a:prstGeom prst="rect">
-            <a:avLst/>
-          </a:prstGeom>
-          <a:noFill/>
-        </p:spPr>
-        <p:txBody>
-          <a:bodyPr wrap="none" rtlCol="0">
-            <a:spAutoFit/>
-          </a:bodyPr>
-          <a:lstStyle/>
-          <a:p>
-            <a:r>
-              <a:rPr lang="es-PE" dirty="0">
-                <a:latin typeface="Franklin Gothic Demi Cond" panose="020B0706030402020204" pitchFamily="34" charset="0"/>
-              </a:rPr>
-              <a:t>OTORGADO A:</a:t>
-            </a:r>
-          </a:p>
-        </p:txBody>
-      </p:sp>
-      <p:sp>
-        <p:nvSpPr>
-          <p:cNvPr id="16" name="CuadroTexto 15"/>
-          <p:cNvSpPr txBox="1"/>
-          <p:nvPr/>
-        </p:nvSpPr>
-        <p:spPr>
-          <a:xfrm>
-            <a:off x="2493041" y="1892852"/>
-            <a:ext cx="4919937" cy="523220"/>
-          </a:xfrm>
-          <a:prstGeom prst="rect">
-            <a:avLst/>
-          </a:prstGeom>
-          <a:noFill/>
-        </p:spPr>
-        <p:txBody>
-          <a:bodyPr wrap="none" rtlCol="0">
-            <a:spAutoFit/>
-          </a:bodyPr>
-          <a:lstStyle/>
-          <a:p>
-            <a:pPr algn="ctr"/>
-            <a:r>
-              <a:rPr lang="es-PE" sz="2800" dirty="0">
-                <a:latin typeface="Britannic Bold" panose="020B0903060703020204" pitchFamily="34" charset="0"/>
-              </a:rPr>
-              <a:t>{{NOMBRES}} {{APELLIDOS}}</a:t>
-            </a:r>
-          </a:p>
-        </p:txBody>
-      </p:sp>
-      <p:sp>
-        <p:nvSpPr>
-          <p:cNvPr id="17" name="CuadroTexto 16"/>
-          <p:cNvSpPr txBox="1"/>
-          <p:nvPr/>
-        </p:nvSpPr>
-        <p:spPr>
-          <a:xfrm>
-            <a:off x="-303621" y="2298128"/>
-            <a:ext cx="10513263" cy="2185214"/>
-          </a:xfrm>
-          <a:prstGeom prst="rect">
-            <a:avLst/>
-          </a:prstGeom>
-          <a:noFill/>
-        </p:spPr>
-        <p:txBody>
-          <a:bodyPr wrap="none" rtlCol="0">
-            <a:spAutoFit/>
-          </a:bodyPr>
-          <a:lstStyle/>
-          <a:p>
-            <a:pPr algn="ctr"/>
-            <a:r>
-              <a:rPr lang="es-PE" b="1" dirty="0"/>
-              <a:t>Por haber culminado satisfactoriamente el PROGRAMA</a:t>
-            </a:r>
-          </a:p>
-          <a:p>
-            <a:pPr algn="ctr"/>
-            <a:r>
-              <a:rPr lang="es-PE" b="1" dirty="0"/>
-              <a:t>DE ESPECIALIZACIÓN:</a:t>
-            </a:r>
-            <a:endParaRPr lang="es-PE" sz="600" b="1" dirty="0"/>
-          </a:p>
-          <a:p>
-            <a:pPr algn="ctr"/>
-            <a:r>
-              <a:rPr lang="es-PE" sz="2800" dirty="0">
-                <a:latin typeface="Britannic Bold" panose="020B0903060703020204" pitchFamily="34" charset="0"/>
-              </a:rPr>
-              <a:t>“</a:t>
-            </a:r>
-            <a:r>
-              <a:rPr lang="es-ES" sz="2800" dirty="0">
-                <a:latin typeface="Britannic Bold" panose="020B0903060703020204" pitchFamily="34" charset="0"/>
-              </a:rPr>
-              <a:t>{{TEMA_DIPLOMADO}}</a:t>
-            </a:r>
-            <a:r>
-              <a:rPr lang="es-PE" sz="2800" dirty="0">
-                <a:latin typeface="Britannic Bold" panose="020B0903060703020204" pitchFamily="34" charset="0"/>
-              </a:rPr>
-              <a:t>”</a:t>
-            </a:r>
-          </a:p>
-          <a:p>
-            <a:pPr algn="ctr"/>
-            <a:r>
-              <a:rPr lang="es-PE" b="1" dirty="0"/>
-              <a:t>Realizado del {{FECHA_INICIO}} al {{FECHA_FIN}}, con una</a:t>
-            </a:r>
-          </a:p>
-          <a:p>
-            <a:pPr algn="ctr"/>
-            <a:r>
-              <a:rPr lang="es-PE" b="1" dirty="0"/>
-              <a:t>duración de {{HORAS_ACADEMICAS}} horas Académicos y {{CREDITOS_ACADEMICOS}} créditos Académicos.</a:t>
-            </a:r>
-          </a:p>
-          <a:p>
-            <a:pPr algn="ctr"/>
-            <a:r>
-              <a:rPr lang="es-PE" b="1" dirty="0"/>
-              <a:t>Por tanto, se expide el presente Programa de Especialización, otorgándole los</a:t>
-            </a:r>
-          </a:p>
-          <a:p>
-            <a:pPr algn="ctr"/>
-            <a:r>
-              <a:rPr lang="es-PE" b="1" dirty="0"/>
-              <a:t>privilegios y consideraciones que le corresponden.</a:t>
-            </a:r>
-          </a:p>
-        </p:txBody>
-      </p:sp>
-      <p:sp>
-        <p:nvSpPr>
-          <p:cNvPr id="18" name="CuadroTexto 17"/>
-          <p:cNvSpPr txBox="1"/>
-          <p:nvPr/>
-        </p:nvSpPr>
-        <p:spPr>
-          <a:xfrm>
-            <a:off x="5752362" y="4522265"/>
-            <a:ext cx="3629904" cy="369332"/>
-          </a:xfrm>
-          <a:prstGeom prst="rect">
-            <a:avLst/>
-          </a:prstGeom>
-          <a:noFill/>
-        </p:spPr>
-        <p:txBody>
-          <a:bodyPr wrap="none" rtlCol="0">
-            <a:spAutoFit/>
-          </a:bodyPr>
-          <a:lstStyle/>
-          <a:p>
-            <a:pPr algn="r"/>
-            <a:r>
-              <a:rPr lang="es-PE" b="1" dirty="0"/>
-              <a:t>Trujillo, {{FECHA_EMISION_LARGA}}</a:t>
-            </a:r>
-          </a:p>
-        </p:txBody>
-      </p:sp>
-      <p:sp>
-        <p:nvSpPr>
           <p:cNvPr id="26" name="CuadroTexto 25"/>
           <p:cNvSpPr txBox="1"/>
           <p:nvPr/>
@@ -4036,6 +3754,173 @@
           </a:p>
         </p:txBody>
       </p:sp>
+      <p:sp>
+        <p:nvSpPr>
+          <p:cNvPr id="14" name="CuadroTexto 13">
+            <a:extLst>
+              <a:ext uri="{FF2B5EF4-FFF2-40B4-BE49-F238E27FC236}">
+                <a16:creationId xmlns:a16="http://schemas.microsoft.com/office/drawing/2014/main" id="{C787EE22-1719-D2C1-C135-6FF4DE3533BE}"/>
+              </a:ext>
+            </a:extLst>
+          </p:cNvPr>
+          <p:cNvSpPr txBox="1"/>
+          <p:nvPr/>
+        </p:nvSpPr>
+        <p:spPr>
+          <a:xfrm>
+            <a:off x="4252904" y="1695476"/>
+            <a:ext cx="1400192" cy="369332"/>
+          </a:xfrm>
+          <a:prstGeom prst="rect">
+            <a:avLst/>
+          </a:prstGeom>
+          <a:noFill/>
+        </p:spPr>
+        <p:txBody>
+          <a:bodyPr wrap="none" rtlCol="0">
+            <a:spAutoFit/>
+          </a:bodyPr>
+          <a:lstStyle/>
+          <a:p>
+            <a:r>
+              <a:rPr lang="es-PE" dirty="0">
+                <a:latin typeface="Franklin Gothic Demi Cond" panose="020B0706030402020204" pitchFamily="34" charset="0"/>
+              </a:rPr>
+              <a:t>OTORGADO A:</a:t>
+            </a:r>
+          </a:p>
+        </p:txBody>
+      </p:sp>
+      <p:sp>
+        <p:nvSpPr>
+          <p:cNvPr id="19" name="CuadroTexto 18">
+            <a:extLst>
+              <a:ext uri="{FF2B5EF4-FFF2-40B4-BE49-F238E27FC236}">
+                <a16:creationId xmlns:a16="http://schemas.microsoft.com/office/drawing/2014/main" id="{9D131566-3CE7-C75F-AE7E-FD10C25DD5D6}"/>
+              </a:ext>
+            </a:extLst>
+          </p:cNvPr>
+          <p:cNvSpPr txBox="1"/>
+          <p:nvPr/>
+        </p:nvSpPr>
+        <p:spPr>
+          <a:xfrm>
+            <a:off x="2493035" y="1920848"/>
+            <a:ext cx="4919937" cy="523220"/>
+          </a:xfrm>
+          <a:prstGeom prst="rect">
+            <a:avLst/>
+          </a:prstGeom>
+          <a:noFill/>
+        </p:spPr>
+        <p:txBody>
+          <a:bodyPr wrap="none" rtlCol="0">
+            <a:spAutoFit/>
+          </a:bodyPr>
+          <a:lstStyle/>
+          <a:p>
+            <a:pPr algn="ctr"/>
+            <a:r>
+              <a:rPr lang="es-PE" sz="2800" dirty="0">
+                <a:latin typeface="Britannic Bold" panose="020B0903060703020204" pitchFamily="34" charset="0"/>
+              </a:rPr>
+              <a:t>{{NOMBRES}} {{APELLIDOS}}</a:t>
+            </a:r>
+          </a:p>
+        </p:txBody>
+      </p:sp>
+      <p:sp>
+        <p:nvSpPr>
+          <p:cNvPr id="22" name="CuadroTexto 21">
+            <a:extLst>
+              <a:ext uri="{FF2B5EF4-FFF2-40B4-BE49-F238E27FC236}">
+                <a16:creationId xmlns:a16="http://schemas.microsoft.com/office/drawing/2014/main" id="{4F5FC0C4-11CB-05EB-6EC2-967E2ACEEC3C}"/>
+              </a:ext>
+            </a:extLst>
+          </p:cNvPr>
+          <p:cNvSpPr txBox="1"/>
+          <p:nvPr/>
+        </p:nvSpPr>
+        <p:spPr>
+          <a:xfrm>
+            <a:off x="380775" y="2335455"/>
+            <a:ext cx="9144451" cy="2800767"/>
+          </a:xfrm>
+          <a:prstGeom prst="rect">
+            <a:avLst/>
+          </a:prstGeom>
+          <a:noFill/>
+        </p:spPr>
+        <p:txBody>
+          <a:bodyPr wrap="square" rtlCol="0" anchor="t" anchorCtr="1">
+            <a:spAutoFit/>
+          </a:bodyPr>
+          <a:lstStyle/>
+          <a:p>
+            <a:pPr algn="ctr"/>
+            <a:r>
+              <a:rPr lang="es-PE" b="1" dirty="0"/>
+              <a:t>Por haber culminado satisfactoriamente el PROGRAMA </a:t>
+            </a:r>
+          </a:p>
+          <a:p>
+            <a:pPr algn="ctr"/>
+            <a:r>
+              <a:rPr lang="es-PE" b="1" dirty="0"/>
+              <a:t>DE ESPECIALIZACIÓN en:</a:t>
+            </a:r>
+            <a:endParaRPr lang="es-PE" sz="600" b="1" dirty="0"/>
+          </a:p>
+          <a:p>
+            <a:pPr algn="ctr"/>
+            <a:r>
+              <a:rPr lang="es-PE" sz="2800" dirty="0">
+                <a:latin typeface="Britannic Bold" panose="020B0903060703020204" pitchFamily="34" charset="0"/>
+              </a:rPr>
+              <a:t>“{{TEMA_DIPLOMADO}}”</a:t>
+            </a:r>
+          </a:p>
+          <a:p>
+            <a:pPr algn="ctr"/>
+            <a:r>
+              <a:rPr lang="es-PE" b="1" dirty="0"/>
+              <a:t>Realizado del {{FECHA_INICIO}} al {{FECHA_FIN}}, con una</a:t>
+            </a:r>
+          </a:p>
+          <a:p>
+            <a:pPr algn="ctr"/>
+            <a:r>
+              <a:rPr lang="es-PE" b="1" dirty="0"/>
+              <a:t>duración de {{HORAS_ACADEMICAS}} horas lectivas y {{CREDITOS_ACADEMICOS}} créditos Académicos.</a:t>
+            </a:r>
+          </a:p>
+          <a:p>
+            <a:pPr algn="ctr"/>
+            <a:r>
+              <a:rPr lang="es-PE" b="1" dirty="0"/>
+              <a:t>Por tanto, se expide el presente Programa de Especialización, otorgándole los</a:t>
+            </a:r>
+          </a:p>
+          <a:p>
+            <a:pPr algn="ctr"/>
+            <a:r>
+              <a:rPr lang="es-PE" b="1" dirty="0"/>
+              <a:t>privilegios y consideraciones que le corresponden.</a:t>
+            </a:r>
+          </a:p>
+          <a:p>
+            <a:pPr algn="ctr"/>
+            <a:endParaRPr lang="es-PE" sz="400" b="1" dirty="0"/>
+          </a:p>
+          <a:p>
+            <a:pPr algn="r"/>
+            <a:r>
+              <a:rPr lang="es-PE" b="1" dirty="0"/>
+              <a:t>Trujillo, {{FECHA_EMISION_LARGA}}</a:t>
+            </a:r>
+          </a:p>
+        </p:txBody>
+      </p:sp>
     </p:spTree>
     <p:extLst>
       <p:ext uri="{BB962C8B-B14F-4D97-AF65-F5344CB8AC3E}">
@@ -4184,23 +4069,851 @@
           </a:p>
         </p:txBody>
       </p:sp>
+      <p:pic>
+        <p:nvPicPr>
+          <p:cNvPr id="12" name="Imagen 11"/>
+          <p:cNvPicPr>
+            <a:picLocks noChangeAspect="1"/>
+          </p:cNvPicPr>
+          <p:nvPr/>
+        </p:nvPicPr>
+        <p:blipFill>
+          <a:blip r:embed="rId3"/>
+          <a:stretch>
+            <a:fillRect/>
+          </a:stretch>
+        </p:blipFill>
+        <p:spPr>
+          <a:xfrm>
+            <a:off x="6298442" y="199447"/>
+            <a:ext cx="2957853" cy="758326"/>
+          </a:xfrm>
+          <a:prstGeom prst="rect">
+            <a:avLst/>
+          </a:prstGeom>
+        </p:spPr>
+      </p:pic>
+      <p:pic>
+        <p:nvPicPr>
+          <p:cNvPr id="27" name="Imagen 26"/>
+          <p:cNvPicPr>
+            <a:picLocks noChangeAspect="1"/>
+          </p:cNvPicPr>
+          <p:nvPr/>
+        </p:nvPicPr>
+        <p:blipFill rotWithShape="1">
+          <a:blip r:embed="rId4"/>
+          <a:srcRect l="4716" r="4485"/>
+          <a:stretch/>
+        </p:blipFill>
+        <p:spPr>
+          <a:xfrm>
+            <a:off x="534757" y="230243"/>
+            <a:ext cx="2563572" cy="864296"/>
+          </a:xfrm>
+          <a:prstGeom prst="rect">
+            <a:avLst/>
+          </a:prstGeom>
+        </p:spPr>
+      </p:pic>
+      <p:sp>
+        <p:nvSpPr>
+          <p:cNvPr id="28" name="CuadroTexto 27"/>
+          <p:cNvSpPr txBox="1"/>
+          <p:nvPr/>
+        </p:nvSpPr>
+        <p:spPr>
+          <a:xfrm>
+            <a:off x="792801" y="982048"/>
+            <a:ext cx="1642822" cy="338554"/>
+          </a:xfrm>
+          <a:prstGeom prst="rect">
+            <a:avLst/>
+          </a:prstGeom>
+          <a:noFill/>
+        </p:spPr>
+        <p:txBody>
+          <a:bodyPr wrap="none" rtlCol="0">
+            <a:spAutoFit/>
+          </a:bodyPr>
+          <a:lstStyle/>
+          <a:p>
+            <a:r>
+              <a:rPr lang="es-PE" sz="1600" b="1" dirty="0"/>
+              <a:t>R.P N° 1127 1967</a:t>
+            </a:r>
+          </a:p>
+        </p:txBody>
+      </p:sp>
       <p:graphicFrame>
         <p:nvGraphicFramePr>
-          <p:cNvPr id="20" name="Tabla 19"/>
+          <p:cNvPr id="24" name="Tabla 23"/>
           <p:cNvGraphicFramePr>
             <a:graphicFrameLocks noGrp="1"/>
           </p:cNvGraphicFramePr>
           <p:nvPr>
             <p:extLst>
               <p:ext uri="{D42A27DB-BD31-4B8C-83A1-F6EECF244321}">
-                <p14:modId xmlns:p14="http://schemas.microsoft.com/office/powerpoint/2010/main" val="988737758"/>
+                <p14:modId xmlns:p14="http://schemas.microsoft.com/office/powerpoint/2010/main" val="1801883250"/>
               </p:ext>
             </p:extLst>
           </p:nvPr>
         </p:nvGraphicFramePr>
         <p:xfrm>
-          <a:off x="199276" y="2467252"/>
-          <a:ext cx="2988000" cy="1820685"/>
+          <a:off x="3240825" y="1539657"/>
+          <a:ext cx="6412523" cy="434622"/>
+        </p:xfrm>
+        <a:graphic>
+          <a:graphicData uri="http://schemas.openxmlformats.org/drawingml/2006/table">
+            <a:tbl>
+              <a:tblPr firstRow="1" bandRow="1">
+                <a:tableStyleId>{F5AB1C69-6EDB-4FF4-983F-18BD219EF322}</a:tableStyleId>
+              </a:tblPr>
+              <a:tblGrid>
+                <a:gridCol w="6412523">
+                  <a:extLst>
+                    <a:ext uri="{9D8B030D-6E8A-4147-A177-3AD203B41FA5}">
+                      <a16:colId xmlns:a16="http://schemas.microsoft.com/office/drawing/2014/main" val="335546556"/>
+                    </a:ext>
+                  </a:extLst>
+                </a:gridCol>
+              </a:tblGrid>
+              <a:tr h="308522">
+                <a:tc>
+                  <a:txBody>
+                    <a:bodyPr/>
+                    <a:lstStyle/>
+                    <a:p>
+                      <a:pPr algn="ctr"/>
+                      <a:r>
+                        <a:rPr lang="es-PE" sz="1600" u="none" dirty="0"/>
+                        <a:t>TEMARIO</a:t>
+                      </a:r>
+                      <a:endParaRPr lang="es-PE" sz="1600" u="none" baseline="0" dirty="0">
+                        <a:latin typeface="Arial Black" panose="020B0A04020102020204" pitchFamily="34" charset="0"/>
+                      </a:endParaRPr>
+                    </a:p>
+                  </a:txBody>
+                  <a:tcPr marL="190782" marR="190782" marT="95391" marB="95391" anchor="ctr">
+                    <a:lnL w="12700" cap="flat" cmpd="sng" algn="ctr">
+                      <a:solidFill>
+                        <a:schemeClr val="tx1"/>
+                      </a:solidFill>
+                      <a:prstDash val="solid"/>
+                      <a:round/>
+                      <a:headEnd type="none" w="med" len="med"/>
+                      <a:tailEnd type="none" w="med" len="med"/>
+                    </a:lnL>
+                    <a:lnR w="12700" cap="flat" cmpd="sng" algn="ctr">
+                      <a:solidFill>
+                        <a:schemeClr val="tx1"/>
+                      </a:solidFill>
+                      <a:prstDash val="solid"/>
+                      <a:round/>
+                      <a:headEnd type="none" w="med" len="med"/>
+                      <a:tailEnd type="none" w="med" len="med"/>
+                    </a:lnR>
+                    <a:lnT w="12700" cap="flat" cmpd="sng" algn="ctr">
+                      <a:solidFill>
+                        <a:schemeClr val="tx1"/>
+                      </a:solidFill>
+                      <a:prstDash val="solid"/>
+                      <a:round/>
+                      <a:headEnd type="none" w="med" len="med"/>
+                      <a:tailEnd type="none" w="med" len="med"/>
+                    </a:lnT>
+                    <a:lnB w="12700" cap="flat" cmpd="sng" algn="ctr">
+                      <a:solidFill>
+                        <a:schemeClr val="tx1"/>
+                      </a:solidFill>
+                      <a:prstDash val="solid"/>
+                      <a:round/>
+                      <a:headEnd type="none" w="med" len="med"/>
+                      <a:tailEnd type="none" w="med" len="med"/>
+                    </a:lnB>
+                    <a:lnTlToBr w="12700" cmpd="sng">
+                      <a:noFill/>
+                      <a:prstDash val="solid"/>
+                    </a:lnTlToBr>
+                    <a:lnBlToTr w="12700" cmpd="sng">
+                      <a:noFill/>
+                      <a:prstDash val="solid"/>
+                    </a:lnBlToTr>
+                  </a:tcPr>
+                </a:tc>
+                <a:extLst>
+                  <a:ext uri="{0D108BD9-81ED-4DB2-BD59-A6C34878D82A}">
+                    <a16:rowId xmlns:a16="http://schemas.microsoft.com/office/drawing/2014/main" val="4034874865"/>
+                  </a:ext>
+                </a:extLst>
+              </a:tr>
+            </a:tbl>
+          </a:graphicData>
+        </a:graphic>
+      </p:graphicFrame>
+      <p:graphicFrame>
+        <p:nvGraphicFramePr>
+          <p:cNvPr id="29" name="Tabla 28"/>
+          <p:cNvGraphicFramePr>
+            <a:graphicFrameLocks noGrp="1"/>
+          </p:cNvGraphicFramePr>
+          <p:nvPr>
+            <p:extLst>
+              <p:ext uri="{D42A27DB-BD31-4B8C-83A1-F6EECF244321}">
+                <p14:modId xmlns:p14="http://schemas.microsoft.com/office/powerpoint/2010/main" val="1962921421"/>
+              </p:ext>
+            </p:extLst>
+          </p:nvPr>
+        </p:nvGraphicFramePr>
+        <p:xfrm>
+          <a:off x="3240826" y="1974652"/>
+          <a:ext cx="6412523" cy="2270031"/>
+        </p:xfrm>
+        <a:graphic>
+          <a:graphicData uri="http://schemas.openxmlformats.org/drawingml/2006/table">
+            <a:tbl>
+              <a:tblPr firstRow="1" bandRow="1">
+                <a:tableStyleId>{D7AC3CCA-C797-4891-BE02-D94E43425B78}</a:tableStyleId>
+              </a:tblPr>
+              <a:tblGrid>
+                <a:gridCol w="2867389">
+                  <a:extLst>
+                    <a:ext uri="{9D8B030D-6E8A-4147-A177-3AD203B41FA5}">
+                      <a16:colId xmlns:a16="http://schemas.microsoft.com/office/drawing/2014/main" val="3108834388"/>
+                    </a:ext>
+                  </a:extLst>
+                </a:gridCol>
+                <a:gridCol w="3545134">
+                  <a:extLst>
+                    <a:ext uri="{9D8B030D-6E8A-4147-A177-3AD203B41FA5}">
+                      <a16:colId xmlns:a16="http://schemas.microsoft.com/office/drawing/2014/main" val="1484549653"/>
+                    </a:ext>
+                  </a:extLst>
+                </a:gridCol>
+              </a:tblGrid>
+              <a:tr h="269517">
+                <a:tc>
+                  <a:txBody>
+                    <a:bodyPr/>
+                    <a:lstStyle/>
+                    <a:p>
+                      <a:pPr marL="0" algn="ctr" defTabSz="914400" rtl="0" eaLnBrk="1" latinLnBrk="0" hangingPunct="1"/>
+                      <a:r>
+                        <a:rPr lang="es-PE" sz="1100" b="0" kern="1200" dirty="0">
+                          <a:solidFill>
+                            <a:schemeClr val="dk1"/>
+                          </a:solidFill>
+                          <a:latin typeface="+mn-lt"/>
+                          <a:ea typeface="+mn-ea"/>
+                          <a:cs typeface="+mn-cs"/>
+                        </a:rPr>
+                        <a:t>MÓDULO I</a:t>
+                      </a:r>
+                      <a:endParaRPr lang="en-US" sz="1100" b="0" kern="1200" dirty="0">
+                        <a:solidFill>
+                          <a:schemeClr val="dk1"/>
+                        </a:solidFill>
+                        <a:latin typeface="+mn-lt"/>
+                        <a:ea typeface="+mn-ea"/>
+                        <a:cs typeface="+mn-cs"/>
+                      </a:endParaRPr>
+                    </a:p>
+                  </a:txBody>
+                  <a:tcPr anchor="ctr"/>
+                </a:tc>
+                <a:tc>
+                  <a:txBody>
+                    <a:bodyPr/>
+                    <a:lstStyle/>
+                    <a:p>
+                      <a:pPr algn="ctr"/>
+                      <a:r>
+                        <a:rPr lang="es-ES" sz="950" b="0" i="0" kern="1200" dirty="0">
+                          <a:solidFill>
+                            <a:schemeClr val="dk1"/>
+                          </a:solidFill>
+                          <a:effectLst/>
+                          <a:latin typeface="+mn-lt"/>
+                          <a:ea typeface="+mn-ea"/>
+                          <a:cs typeface="+mn-cs"/>
+                        </a:rPr>
+                        <a:t>{{MODULO_1}}</a:t>
+                      </a:r>
+                    </a:p>
+                  </a:txBody>
+                  <a:tcPr anchor="ctr"/>
+                </a:tc>
+                <a:extLst>
+                  <a:ext uri="{0D108BD9-81ED-4DB2-BD59-A6C34878D82A}">
+                    <a16:rowId xmlns:a16="http://schemas.microsoft.com/office/drawing/2014/main" val="200180495"/>
+                  </a:ext>
+                </a:extLst>
+              </a:tr>
+              <a:tr h="269517">
+                <a:tc>
+                  <a:txBody>
+                    <a:bodyPr/>
+                    <a:lstStyle/>
+                    <a:p>
+                      <a:pPr marL="0" algn="ctr" defTabSz="914400" rtl="0" eaLnBrk="1" latinLnBrk="0" hangingPunct="1"/>
+                      <a:r>
+                        <a:rPr lang="es-PE" sz="1100" kern="1200" dirty="0">
+                          <a:solidFill>
+                            <a:schemeClr val="dk1"/>
+                          </a:solidFill>
+                          <a:latin typeface="+mn-lt"/>
+                          <a:ea typeface="+mn-ea"/>
+                          <a:cs typeface="+mn-cs"/>
+                        </a:rPr>
+                        <a:t>MÓDULO II</a:t>
+                      </a:r>
+                      <a:endParaRPr lang="en-US" sz="1100" kern="1200" dirty="0">
+                        <a:solidFill>
+                          <a:schemeClr val="dk1"/>
+                        </a:solidFill>
+                        <a:latin typeface="+mn-lt"/>
+                        <a:ea typeface="+mn-ea"/>
+                        <a:cs typeface="+mn-cs"/>
+                      </a:endParaRPr>
+                    </a:p>
+                  </a:txBody>
+                  <a:tcPr anchor="ctr"/>
+                </a:tc>
+                <a:tc>
+                  <a:txBody>
+                    <a:bodyPr/>
+                    <a:lstStyle/>
+                    <a:p>
+                      <a:pPr algn="ctr"/>
+                      <a:r>
+                        <a:rPr lang="es-ES" sz="950" b="0" i="0" kern="1200" dirty="0">
+                          <a:solidFill>
+                            <a:schemeClr val="dk1"/>
+                          </a:solidFill>
+                          <a:effectLst/>
+                          <a:latin typeface="+mn-lt"/>
+                          <a:ea typeface="+mn-ea"/>
+                          <a:cs typeface="+mn-cs"/>
+                        </a:rPr>
+                        <a:t>{{MODULO_2}}</a:t>
+                      </a:r>
+                    </a:p>
+                  </a:txBody>
+                  <a:tcPr anchor="ctr"/>
+                </a:tc>
+                <a:extLst>
+                  <a:ext uri="{0D108BD9-81ED-4DB2-BD59-A6C34878D82A}">
+                    <a16:rowId xmlns:a16="http://schemas.microsoft.com/office/drawing/2014/main" val="3180852981"/>
+                  </a:ext>
+                </a:extLst>
+              </a:tr>
+              <a:tr h="400568">
+                <a:tc>
+                  <a:txBody>
+                    <a:bodyPr/>
+                    <a:lstStyle/>
+                    <a:p>
+                      <a:pPr marL="0" algn="ctr" defTabSz="914400" rtl="0" eaLnBrk="1" latinLnBrk="0" hangingPunct="1"/>
+                      <a:r>
+                        <a:rPr lang="es-PE" sz="1100" kern="1200" dirty="0">
+                          <a:solidFill>
+                            <a:schemeClr val="dk1"/>
+                          </a:solidFill>
+                          <a:latin typeface="+mn-lt"/>
+                          <a:ea typeface="+mn-ea"/>
+                          <a:cs typeface="+mn-cs"/>
+                        </a:rPr>
+                        <a:t>MÓDULO III</a:t>
+                      </a:r>
+                      <a:endParaRPr lang="en-US" sz="1100" kern="1200" dirty="0">
+                        <a:solidFill>
+                          <a:schemeClr val="dk1"/>
+                        </a:solidFill>
+                        <a:latin typeface="+mn-lt"/>
+                        <a:ea typeface="+mn-ea"/>
+                        <a:cs typeface="+mn-cs"/>
+                      </a:endParaRPr>
+                    </a:p>
+                  </a:txBody>
+                  <a:tcPr anchor="ctr"/>
+                </a:tc>
+                <a:tc>
+                  <a:txBody>
+                    <a:bodyPr/>
+                    <a:lstStyle/>
+                    <a:p>
+                      <a:pPr algn="ctr"/>
+                      <a:r>
+                        <a:rPr lang="es-ES" sz="950" b="0" i="0" kern="1200" dirty="0">
+                          <a:solidFill>
+                            <a:schemeClr val="dk1"/>
+                          </a:solidFill>
+                          <a:effectLst/>
+                          <a:latin typeface="+mn-lt"/>
+                          <a:ea typeface="+mn-ea"/>
+                          <a:cs typeface="+mn-cs"/>
+                        </a:rPr>
+                        <a:t>{{MODULO_3}}</a:t>
+                      </a:r>
+                    </a:p>
+                  </a:txBody>
+                  <a:tcPr anchor="ctr"/>
+                </a:tc>
+                <a:extLst>
+                  <a:ext uri="{0D108BD9-81ED-4DB2-BD59-A6C34878D82A}">
+                    <a16:rowId xmlns:a16="http://schemas.microsoft.com/office/drawing/2014/main" val="4272501331"/>
+                  </a:ext>
+                </a:extLst>
+              </a:tr>
+              <a:tr h="294109">
+                <a:tc>
+                  <a:txBody>
+                    <a:bodyPr/>
+                    <a:lstStyle/>
+                    <a:p>
+                      <a:pPr marL="0" algn="ctr" defTabSz="914400" rtl="0" eaLnBrk="1" latinLnBrk="0" hangingPunct="1"/>
+                      <a:r>
+                        <a:rPr lang="es-PE" sz="1100" kern="1200" dirty="0">
+                          <a:solidFill>
+                            <a:schemeClr val="dk1"/>
+                          </a:solidFill>
+                          <a:latin typeface="+mn-lt"/>
+                          <a:ea typeface="+mn-ea"/>
+                          <a:cs typeface="+mn-cs"/>
+                        </a:rPr>
+                        <a:t>MÓDULO IV</a:t>
+                      </a:r>
+                      <a:endParaRPr lang="en-US" sz="1100" kern="1200" dirty="0">
+                        <a:solidFill>
+                          <a:schemeClr val="dk1"/>
+                        </a:solidFill>
+                        <a:latin typeface="+mn-lt"/>
+                        <a:ea typeface="+mn-ea"/>
+                        <a:cs typeface="+mn-cs"/>
+                      </a:endParaRPr>
+                    </a:p>
+                  </a:txBody>
+                  <a:tcPr anchor="ctr"/>
+                </a:tc>
+                <a:tc>
+                  <a:txBody>
+                    <a:bodyPr/>
+                    <a:lstStyle/>
+                    <a:p>
+                      <a:pPr algn="ctr"/>
+                      <a:r>
+                        <a:rPr lang="es-ES" sz="950" b="0" i="0" kern="1200" dirty="0">
+                          <a:solidFill>
+                            <a:schemeClr val="dk1"/>
+                          </a:solidFill>
+                          <a:effectLst/>
+                          <a:latin typeface="+mn-lt"/>
+                          <a:ea typeface="+mn-ea"/>
+                          <a:cs typeface="+mn-cs"/>
+                        </a:rPr>
+                        <a:t>{{MODULO_4}}</a:t>
+                      </a:r>
+                    </a:p>
+                  </a:txBody>
+                  <a:tcPr anchor="ctr"/>
+                </a:tc>
+                <a:extLst>
+                  <a:ext uri="{0D108BD9-81ED-4DB2-BD59-A6C34878D82A}">
+                    <a16:rowId xmlns:a16="http://schemas.microsoft.com/office/drawing/2014/main" val="2661531471"/>
+                  </a:ext>
+                </a:extLst>
+              </a:tr>
+              <a:tr h="182174">
+                <a:tc>
+                  <a:txBody>
+                    <a:bodyPr/>
+                    <a:lstStyle/>
+                    <a:p>
+                      <a:pPr marL="0" algn="ctr" defTabSz="914400" rtl="0" eaLnBrk="1" latinLnBrk="0" hangingPunct="1"/>
+                      <a:r>
+                        <a:rPr lang="es-PE" sz="1100" kern="1200" dirty="0">
+                          <a:solidFill>
+                            <a:schemeClr val="dk1"/>
+                          </a:solidFill>
+                          <a:latin typeface="+mn-lt"/>
+                          <a:ea typeface="+mn-ea"/>
+                          <a:cs typeface="+mn-cs"/>
+                        </a:rPr>
+                        <a:t>MÓDULO V</a:t>
+                      </a:r>
+                      <a:endParaRPr lang="en-US" sz="1100" kern="1200" dirty="0">
+                        <a:solidFill>
+                          <a:schemeClr val="dk1"/>
+                        </a:solidFill>
+                        <a:latin typeface="+mn-lt"/>
+                        <a:ea typeface="+mn-ea"/>
+                        <a:cs typeface="+mn-cs"/>
+                      </a:endParaRPr>
+                    </a:p>
+                  </a:txBody>
+                  <a:tcPr anchor="ctr"/>
+                </a:tc>
+                <a:tc>
+                  <a:txBody>
+                    <a:bodyPr/>
+                    <a:lstStyle/>
+                    <a:p>
+                      <a:pPr algn="ctr"/>
+                      <a:r>
+                        <a:rPr lang="es-ES" sz="950" b="0" i="0" kern="1200" dirty="0">
+                          <a:solidFill>
+                            <a:schemeClr val="dk1"/>
+                          </a:solidFill>
+                          <a:effectLst/>
+                          <a:latin typeface="+mn-lt"/>
+                          <a:ea typeface="+mn-ea"/>
+                          <a:cs typeface="+mn-cs"/>
+                        </a:rPr>
+                        <a:t>{{MODULO_5}}</a:t>
+                      </a:r>
+                    </a:p>
+                  </a:txBody>
+                  <a:tcPr anchor="ctr"/>
+                </a:tc>
+                <a:extLst>
+                  <a:ext uri="{0D108BD9-81ED-4DB2-BD59-A6C34878D82A}">
+                    <a16:rowId xmlns:a16="http://schemas.microsoft.com/office/drawing/2014/main" val="3024625614"/>
+                  </a:ext>
+                </a:extLst>
+              </a:tr>
+              <a:tr h="182174">
+                <a:tc>
+                  <a:txBody>
+                    <a:bodyPr/>
+                    <a:lstStyle/>
+                    <a:p>
+                      <a:pPr marL="0" algn="ctr" defTabSz="914400" rtl="0" eaLnBrk="1" latinLnBrk="0" hangingPunct="1"/>
+                      <a:r>
+                        <a:rPr lang="es-PE" sz="1100" kern="1200" dirty="0">
+                          <a:solidFill>
+                            <a:schemeClr val="dk1"/>
+                          </a:solidFill>
+                          <a:latin typeface="+mn-lt"/>
+                          <a:ea typeface="+mn-ea"/>
+                          <a:cs typeface="+mn-cs"/>
+                        </a:rPr>
+                        <a:t>MÓDULO VI</a:t>
+                      </a:r>
+                      <a:endParaRPr lang="en-US" sz="1100" kern="1200" dirty="0">
+                        <a:solidFill>
+                          <a:schemeClr val="dk1"/>
+                        </a:solidFill>
+                        <a:latin typeface="+mn-lt"/>
+                        <a:ea typeface="+mn-ea"/>
+                        <a:cs typeface="+mn-cs"/>
+                      </a:endParaRPr>
+                    </a:p>
+                  </a:txBody>
+                  <a:tcPr anchor="ctr"/>
+                </a:tc>
+                <a:tc>
+                  <a:txBody>
+                    <a:bodyPr/>
+                    <a:lstStyle/>
+                    <a:p>
+                      <a:pPr algn="ctr"/>
+                      <a:r>
+                        <a:rPr lang="es-ES" sz="950" b="0" i="0" kern="1200" dirty="0">
+                          <a:solidFill>
+                            <a:schemeClr val="dk1"/>
+                          </a:solidFill>
+                          <a:effectLst/>
+                          <a:latin typeface="+mn-lt"/>
+                          <a:ea typeface="+mn-ea"/>
+                          <a:cs typeface="+mn-cs"/>
+                        </a:rPr>
+                        <a:t>{{MODULO_6}}</a:t>
+                      </a:r>
+                    </a:p>
+                  </a:txBody>
+                  <a:tcPr anchor="ctr"/>
+                </a:tc>
+                <a:extLst>
+                  <a:ext uri="{0D108BD9-81ED-4DB2-BD59-A6C34878D82A}">
+                    <a16:rowId xmlns:a16="http://schemas.microsoft.com/office/drawing/2014/main" val="4254236312"/>
+                  </a:ext>
+                </a:extLst>
+              </a:tr>
+              <a:tr h="182174">
+                <a:tc>
+                  <a:txBody>
+                    <a:bodyPr/>
+                    <a:lstStyle/>
+                    <a:p>
+                      <a:pPr marL="0" algn="ctr" defTabSz="914400" rtl="0" eaLnBrk="1" latinLnBrk="0" hangingPunct="1"/>
+                      <a:r>
+                        <a:rPr lang="es-PE" sz="1100" kern="1200" dirty="0">
+                          <a:solidFill>
+                            <a:schemeClr val="dk1"/>
+                          </a:solidFill>
+                          <a:latin typeface="+mn-lt"/>
+                          <a:ea typeface="+mn-ea"/>
+                          <a:cs typeface="+mn-cs"/>
+                        </a:rPr>
+                        <a:t>MÓDULO VII</a:t>
+                      </a:r>
+                      <a:endParaRPr lang="en-US" sz="1100" kern="1200" dirty="0">
+                        <a:solidFill>
+                          <a:schemeClr val="dk1"/>
+                        </a:solidFill>
+                        <a:latin typeface="+mn-lt"/>
+                        <a:ea typeface="+mn-ea"/>
+                        <a:cs typeface="+mn-cs"/>
+                      </a:endParaRPr>
+                    </a:p>
+                  </a:txBody>
+                  <a:tcPr anchor="ctr"/>
+                </a:tc>
+                <a:tc>
+                  <a:txBody>
+                    <a:bodyPr/>
+                    <a:lstStyle/>
+                    <a:p>
+                      <a:pPr algn="ctr"/>
+                      <a:r>
+                        <a:rPr lang="es-ES" sz="950" b="0" i="0" kern="1200" dirty="0">
+                          <a:solidFill>
+                            <a:schemeClr val="dk1"/>
+                          </a:solidFill>
+                          <a:effectLst/>
+                          <a:latin typeface="+mn-lt"/>
+                          <a:ea typeface="+mn-ea"/>
+                          <a:cs typeface="+mn-cs"/>
+                        </a:rPr>
+                        <a:t>{{MODULO_7}}</a:t>
+                      </a:r>
+                    </a:p>
+                  </a:txBody>
+                  <a:tcPr anchor="ctr"/>
+                </a:tc>
+                <a:extLst>
+                  <a:ext uri="{0D108BD9-81ED-4DB2-BD59-A6C34878D82A}">
+                    <a16:rowId xmlns:a16="http://schemas.microsoft.com/office/drawing/2014/main" val="2174920499"/>
+                  </a:ext>
+                </a:extLst>
+              </a:tr>
+              <a:tr h="182174">
+                <a:tc>
+                  <a:txBody>
+                    <a:bodyPr/>
+                    <a:lstStyle/>
+                    <a:p>
+                      <a:pPr marL="0" marR="0" lvl="0" indent="0" algn="ctr" defTabSz="914400" rtl="0" eaLnBrk="1" fontAlgn="auto" latinLnBrk="0" hangingPunct="1">
+                        <a:lnSpc>
+                          <a:spcPct val="100000"/>
+                        </a:lnSpc>
+                        <a:spcBef>
+                          <a:spcPts val="0"/>
+                        </a:spcBef>
+                        <a:spcAft>
+                          <a:spcPts val="0"/>
+                        </a:spcAft>
+                        <a:buClrTx/>
+                        <a:buSzTx/>
+                        <a:buFontTx/>
+                        <a:buNone/>
+                        <a:tabLst/>
+                        <a:defRPr/>
+                      </a:pPr>
+                      <a:r>
+                        <a:rPr lang="es-PE" sz="1100" kern="1200" dirty="0">
+                          <a:solidFill>
+                            <a:schemeClr val="dk1"/>
+                          </a:solidFill>
+                          <a:latin typeface="+mn-lt"/>
+                          <a:ea typeface="+mn-ea"/>
+                          <a:cs typeface="+mn-cs"/>
+                        </a:rPr>
+                        <a:t>MÓDULO VII</a:t>
+                      </a:r>
+                      <a:r>
+                        <a:rPr lang="en-US" sz="1100" kern="1200" dirty="0">
+                          <a:solidFill>
+                            <a:schemeClr val="dk1"/>
+                          </a:solidFill>
+                          <a:latin typeface="+mn-lt"/>
+                          <a:ea typeface="+mn-ea"/>
+                          <a:cs typeface="+mn-cs"/>
+                        </a:rPr>
+                        <a:t>I</a:t>
+                      </a:r>
+                    </a:p>
+                  </a:txBody>
+                  <a:tcPr anchor="ctr"/>
+                </a:tc>
+                <a:tc>
+                  <a:txBody>
+                    <a:bodyPr/>
+                    <a:lstStyle/>
+                    <a:p>
+                      <a:pPr algn="ctr"/>
+                      <a:r>
+                        <a:rPr lang="es-ES" sz="950" b="0" i="0" kern="1200" dirty="0">
+                          <a:solidFill>
+                            <a:schemeClr val="dk1"/>
+                          </a:solidFill>
+                          <a:effectLst/>
+                          <a:latin typeface="+mn-lt"/>
+                          <a:ea typeface="+mn-ea"/>
+                          <a:cs typeface="+mn-cs"/>
+                        </a:rPr>
+                        <a:t>{{MODULO_8}}</a:t>
+                      </a:r>
+                    </a:p>
+                  </a:txBody>
+                  <a:tcPr anchor="ctr"/>
+                </a:tc>
+                <a:extLst>
+                  <a:ext uri="{0D108BD9-81ED-4DB2-BD59-A6C34878D82A}">
+                    <a16:rowId xmlns:a16="http://schemas.microsoft.com/office/drawing/2014/main" val="1021187121"/>
+                  </a:ext>
+                </a:extLst>
+              </a:tr>
+            </a:tbl>
+          </a:graphicData>
+        </a:graphic>
+      </p:graphicFrame>
+      <p:grpSp>
+        <p:nvGrpSpPr>
+          <p:cNvPr id="3" name="Grupo 2">
+            <a:extLst>
+              <a:ext uri="{FF2B5EF4-FFF2-40B4-BE49-F238E27FC236}">
+                <a16:creationId xmlns:a16="http://schemas.microsoft.com/office/drawing/2014/main" id="{7ECAD10F-1D94-C9A0-EDA3-4FD687F3ECA3}"/>
+              </a:ext>
+            </a:extLst>
+          </p:cNvPr>
+          <p:cNvGrpSpPr/>
+          <p:nvPr/>
+        </p:nvGrpSpPr>
+        <p:grpSpPr>
+          <a:xfrm>
+            <a:off x="611025" y="6108603"/>
+            <a:ext cx="2297657" cy="437033"/>
+            <a:chOff x="4281274" y="8807352"/>
+            <a:chExt cx="2297657" cy="437033"/>
+          </a:xfrm>
+        </p:grpSpPr>
+        <p:sp>
+          <p:nvSpPr>
+            <p:cNvPr id="4" name="Rectángulo 3">
+              <a:extLst>
+                <a:ext uri="{FF2B5EF4-FFF2-40B4-BE49-F238E27FC236}">
+                  <a16:creationId xmlns:a16="http://schemas.microsoft.com/office/drawing/2014/main" id="{9E7B3D0B-95C0-C766-86DE-08454CE74898}"/>
+                </a:ext>
+              </a:extLst>
+            </p:cNvPr>
+            <p:cNvSpPr/>
+            <p:nvPr/>
+          </p:nvSpPr>
+          <p:spPr>
+            <a:xfrm>
+              <a:off x="4312624" y="8807352"/>
+              <a:ext cx="2213928" cy="437033"/>
+            </a:xfrm>
+            <a:prstGeom prst="rect">
+              <a:avLst/>
+            </a:prstGeom>
+            <a:noFill/>
+          </p:spPr>
+          <p:style>
+            <a:lnRef idx="2">
+              <a:schemeClr val="accent1">
+                <a:shade val="15000"/>
+              </a:schemeClr>
+            </a:lnRef>
+            <a:fillRef idx="1">
+              <a:schemeClr val="accent1"/>
+            </a:fillRef>
+            <a:effectRef idx="0">
+              <a:schemeClr val="accent1"/>
+            </a:effectRef>
+            <a:fontRef idx="minor">
+              <a:schemeClr val="lt1"/>
+            </a:fontRef>
+          </p:style>
+          <p:txBody>
+            <a:bodyPr rtlCol="0" anchor="ctr"/>
+            <a:lstStyle/>
+            <a:p>
+              <a:pPr algn="ctr"/>
+              <a:endParaRPr lang="es-PE"/>
+            </a:p>
+          </p:txBody>
+        </p:sp>
+        <p:sp>
+          <p:nvSpPr>
+            <p:cNvPr id="5" name="CuadroTexto 4">
+              <a:extLst>
+                <a:ext uri="{FF2B5EF4-FFF2-40B4-BE49-F238E27FC236}">
+                  <a16:creationId xmlns:a16="http://schemas.microsoft.com/office/drawing/2014/main" id="{1EF057FA-8464-54BE-CE7F-16748780A949}"/>
+                </a:ext>
+              </a:extLst>
+            </p:cNvPr>
+            <p:cNvSpPr txBox="1"/>
+            <p:nvPr/>
+          </p:nvSpPr>
+          <p:spPr>
+            <a:xfrm>
+              <a:off x="4281274" y="8809560"/>
+              <a:ext cx="2297657" cy="392415"/>
+            </a:xfrm>
+            <a:prstGeom prst="rect">
+              <a:avLst/>
+            </a:prstGeom>
+            <a:noFill/>
+          </p:spPr>
+          <p:txBody>
+            <a:bodyPr wrap="square" rtlCol="0">
+              <a:spAutoFit/>
+            </a:bodyPr>
+            <a:lstStyle/>
+            <a:p>
+              <a:r>
+                <a:rPr lang="es-PE" sz="650" b="1" dirty="0"/>
+                <a:t>PARA POSTERIOR VERIFICACIÓN DE ESTE CERTIFICADO SE PUEDE REALIZAR INGRESANDO EL CÓDIGO DEL ESTUDIANTE EN: </a:t>
+              </a:r>
+              <a:r>
+                <a:rPr lang="es-PE" sz="650" b="1" dirty="0">
+                  <a:hlinkClick r:id="rId5"/>
+                </a:rPr>
+                <a:t>https://especializacionvirtual.com/validar-certificado/</a:t>
+              </a:r>
+              <a:r>
+                <a:rPr lang="es-PE" sz="650" b="1" dirty="0"/>
+                <a:t> </a:t>
+              </a:r>
+            </a:p>
+          </p:txBody>
+        </p:sp>
+      </p:grpSp>
+      <p:graphicFrame>
+        <p:nvGraphicFramePr>
+          <p:cNvPr id="8" name="Tabla 7">
+            <a:extLst>
+              <a:ext uri="{FF2B5EF4-FFF2-40B4-BE49-F238E27FC236}">
+                <a16:creationId xmlns:a16="http://schemas.microsoft.com/office/drawing/2014/main" id="{8B361D77-35F6-FD8F-5B47-CD50BE4C1CFE}"/>
+              </a:ext>
+            </a:extLst>
+          </p:cNvPr>
+          <p:cNvGraphicFramePr>
+            <a:graphicFrameLocks noGrp="1"/>
+          </p:cNvGraphicFramePr>
+          <p:nvPr>
+            <p:extLst>
+              <p:ext uri="{D42A27DB-BD31-4B8C-83A1-F6EECF244321}">
+                <p14:modId xmlns:p14="http://schemas.microsoft.com/office/powerpoint/2010/main" val="142206095"/>
+              </p:ext>
+            </p:extLst>
+          </p:nvPr>
+        </p:nvGraphicFramePr>
+        <p:xfrm>
+          <a:off x="227269" y="2243308"/>
+          <a:ext cx="2916000" cy="1820685"/>
         </p:xfrm>
         <a:graphic>
           <a:graphicData uri="http://schemas.openxmlformats.org/drawingml/2006/table">
@@ -4209,14 +4922,14 @@
                 <a:tableStyleId>{F2DE63D5-997A-4646-A377-4702673A728D}</a:tableStyleId>
               </a:tblPr>
               <a:tblGrid>
-                <a:gridCol w="977268">
+                <a:gridCol w="953720">
                   <a:extLst>
                     <a:ext uri="{9D8B030D-6E8A-4147-A177-3AD203B41FA5}">
                       <a16:colId xmlns:a16="http://schemas.microsoft.com/office/drawing/2014/main" val="3956221826"/>
                     </a:ext>
                   </a:extLst>
                 </a:gridCol>
-                <a:gridCol w="2010732">
+                <a:gridCol w="1962280">
                   <a:extLst>
                     <a:ext uri="{9D8B030D-6E8A-4147-A177-3AD203B41FA5}">
                       <a16:colId xmlns:a16="http://schemas.microsoft.com/office/drawing/2014/main" val="3056520887"/>
@@ -4321,7 +5034,23 @@
                     <a:bodyPr/>
                     <a:lstStyle/>
                     <a:p>
-                      <a:pPr algn="ctr"/>
+                      <a:pPr marL="0" marR="0" lvl="0" indent="0" algn="ctr" defTabSz="914400" rtl="0" eaLnBrk="1" fontAlgn="auto" latinLnBrk="0" hangingPunct="1">
+                        <a:lnSpc>
+                          <a:spcPct val="100000"/>
+                        </a:lnSpc>
+                        <a:spcBef>
+                          <a:spcPts val="0"/>
+                        </a:spcBef>
+                        <a:spcAft>
+                          <a:spcPts val="0"/>
+                        </a:spcAft>
+                        <a:buClrTx/>
+                        <a:buSzTx/>
+                        <a:buFontTx/>
+                        <a:buNone/>
+                        <a:tabLst/>
+                        <a:defRPr/>
+                      </a:pPr>
                       <a:r>
                         <a:rPr lang="es-PE" sz="1050" dirty="0"/>
                         <a:t>{{FOLIO_NUMERO}} –</a:t>
@@ -4360,7 +5089,23 @@
                     <a:bodyPr/>
                     <a:lstStyle/>
                     <a:p>
-                      <a:pPr algn="ctr"/>
+                      <a:pPr marL="0" marR="0" lvl="0" indent="0" algn="ctr" defTabSz="914400" rtl="0" eaLnBrk="1" fontAlgn="auto" latinLnBrk="0" hangingPunct="1">
+                        <a:lnSpc>
+                          <a:spcPct val="100000"/>
+                        </a:lnSpc>
+                        <a:spcBef>
+                          <a:spcPts val="0"/>
+                        </a:spcBef>
+                        <a:spcAft>
+                          <a:spcPts val="0"/>
+                        </a:spcAft>
+                        <a:buClrTx/>
+                        <a:buSzTx/>
+                        <a:buFontTx/>
+                        <a:buNone/>
+                        <a:tabLst/>
+                        <a:defRPr/>
+                      </a:pPr>
                       <a:r>
                         <a:rPr lang="es-PE" sz="1050" dirty="0"/>
                         <a:t>{{FECHA_EMISION_CORTA}}</a:t>
@@ -4410,47 +5155,29 @@
           </a:graphicData>
         </a:graphic>
       </p:graphicFrame>
-      <p:pic>
-        <p:nvPicPr>
-          <p:cNvPr id="12" name="Imagen 11"/>
-          <p:cNvPicPr>
-            <a:picLocks noChangeAspect="1"/>
-          </p:cNvPicPr>
-          <p:nvPr/>
-        </p:nvPicPr>
-        <p:blipFill>
-          <a:blip r:embed="rId3"/>
-          <a:stretch>
-            <a:fillRect/>
-          </a:stretch>
-        </p:blipFill>
-        <p:spPr>
-          <a:xfrm>
-            <a:off x="6298442" y="199447"/>
-            <a:ext cx="2957853" cy="758326"/>
-          </a:xfrm>
-          <a:prstGeom prst="rect">
-            <a:avLst/>
-          </a:prstGeom>
-        </p:spPr>
-      </p:pic>
       <p:graphicFrame>
         <p:nvGraphicFramePr>
-          <p:cNvPr id="21" name="Tabla 20"/>
+          <p:cNvPr id="9" name="Tabla 8">
+            <a:extLst>
+              <a:ext uri="{FF2B5EF4-FFF2-40B4-BE49-F238E27FC236}">
+                <a16:creationId xmlns:a16="http://schemas.microsoft.com/office/drawing/2014/main" id="{EDB9D92F-92B8-9EED-FB21-E81EFD45D745}"/>
+              </a:ext>
+            </a:extLst>
+          </p:cNvPr>
           <p:cNvGraphicFramePr>
             <a:graphicFrameLocks noGrp="1"/>
           </p:cNvGraphicFramePr>
           <p:nvPr>
             <p:extLst>
               <p:ext uri="{D42A27DB-BD31-4B8C-83A1-F6EECF244321}">
-                <p14:modId xmlns:p14="http://schemas.microsoft.com/office/powerpoint/2010/main" val="3390891972"/>
+                <p14:modId xmlns:p14="http://schemas.microsoft.com/office/powerpoint/2010/main" val="1056775222"/>
               </p:ext>
             </p:extLst>
           </p:nvPr>
         </p:nvGraphicFramePr>
         <p:xfrm>
-          <a:off x="199276" y="4465779"/>
-          <a:ext cx="2988000" cy="336094"/>
+          <a:off x="227269" y="4241835"/>
+          <a:ext cx="2916000" cy="336094"/>
         </p:xfrm>
         <a:graphic>
           <a:graphicData uri="http://schemas.openxmlformats.org/drawingml/2006/table">
@@ -4459,14 +5186,14 @@
                 <a:tableStyleId>{5940675A-B579-460E-94D1-54222C63F5DA}</a:tableStyleId>
               </a:tblPr>
               <a:tblGrid>
-                <a:gridCol w="1906859">
+                <a:gridCol w="1860911">
                   <a:extLst>
                     <a:ext uri="{9D8B030D-6E8A-4147-A177-3AD203B41FA5}">
                       <a16:colId xmlns:a16="http://schemas.microsoft.com/office/drawing/2014/main" val="2813972394"/>
                     </a:ext>
                   </a:extLst>
                 </a:gridCol>
-                <a:gridCol w="1081141">
+                <a:gridCol w="1055089">
                   <a:extLst>
                     <a:ext uri="{9D8B030D-6E8A-4147-A177-3AD203B41FA5}">
                       <a16:colId xmlns:a16="http://schemas.microsoft.com/office/drawing/2014/main" val="1981345291"/>
@@ -4505,7 +5232,7 @@
                       <a:pPr algn="ctr"/>
                       <a:r>
                         <a:rPr lang="es-ES" sz="1500" dirty="0"/>
-                        <a:t>18</a:t>
+                        <a:t>19</a:t>
                       </a:r>
                       <a:endParaRPr lang="en-US" sz="1500" dirty="0"/>
                     </a:p>
@@ -4524,72 +5251,26 @@
       </p:graphicFrame>
       <p:pic>
         <p:nvPicPr>
-          <p:cNvPr id="27" name="Imagen 26"/>
+          <p:cNvPr id="10" name="Imagen 9">
+            <a:extLst>
+              <a:ext uri="{FF2B5EF4-FFF2-40B4-BE49-F238E27FC236}">
+                <a16:creationId xmlns:a16="http://schemas.microsoft.com/office/drawing/2014/main" id="{5CF40D62-F177-89A5-FD52-D995DC3A704F}"/>
+              </a:ext>
+            </a:extLst>
+          </p:cNvPr>
           <p:cNvPicPr>
             <a:picLocks noChangeAspect="1"/>
           </p:cNvPicPr>
           <p:nvPr/>
         </p:nvPicPr>
         <p:blipFill rotWithShape="1">
-          <a:blip r:embed="rId4"/>
-          <a:srcRect l="4716" r="4485"/>
-          <a:stretch/>
-        </p:blipFill>
-        <p:spPr>
-          <a:xfrm>
-            <a:off x="534757" y="230243"/>
-            <a:ext cx="2563572" cy="864296"/>
-          </a:xfrm>
-          <a:prstGeom prst="rect">
-            <a:avLst/>
-          </a:prstGeom>
-        </p:spPr>
-      </p:pic>
-      <p:sp>
-        <p:nvSpPr>
-          <p:cNvPr id="28" name="CuadroTexto 27"/>
-          <p:cNvSpPr txBox="1"/>
-          <p:nvPr/>
-        </p:nvSpPr>
-        <p:spPr>
-          <a:xfrm>
-            <a:off x="792801" y="982048"/>
-            <a:ext cx="1642822" cy="338554"/>
-          </a:xfrm>
-          <a:prstGeom prst="rect">
-            <a:avLst/>
-          </a:prstGeom>
-          <a:noFill/>
-        </p:spPr>
-        <p:txBody>
-          <a:bodyPr wrap="none" rtlCol="0">
-            <a:spAutoFit/>
-          </a:bodyPr>
-          <a:lstStyle/>
-          <a:p>
-            <a:r>
-              <a:rPr lang="es-PE" sz="1600" b="1" dirty="0"/>
-              <a:t>R.P N° 1127 1967</a:t>
-            </a:r>
-          </a:p>
-        </p:txBody>
-      </p:sp>
-      <p:pic>
-        <p:nvPicPr>
-          <p:cNvPr id="13" name="Imagen 12"/>
-          <p:cNvPicPr>
-            <a:picLocks noChangeAspect="1"/>
-          </p:cNvPicPr>
-          <p:nvPr/>
-        </p:nvPicPr>
-        <p:blipFill rotWithShape="1">
-          <a:blip r:embed="rId5"/>
+          <a:blip r:embed="rId6"/>
           <a:srcRect b="6974"/>
           <a:stretch/>
         </p:blipFill>
         <p:spPr>
           <a:xfrm>
-            <a:off x="1458829" y="3957005"/>
+            <a:off x="1486822" y="3733061"/>
             <a:ext cx="455266" cy="308814"/>
           </a:xfrm>
           <a:prstGeom prst="rect">
@@ -4597,645 +5278,12 @@
           </a:prstGeom>
         </p:spPr>
       </p:pic>
-      <p:graphicFrame>
-        <p:nvGraphicFramePr>
-          <p:cNvPr id="24" name="Tabla 23"/>
-          <p:cNvGraphicFramePr>
-            <a:graphicFrameLocks noGrp="1"/>
-          </p:cNvGraphicFramePr>
-          <p:nvPr>
-            <p:extLst>
-              <p:ext uri="{D42A27DB-BD31-4B8C-83A1-F6EECF244321}">
-                <p14:modId xmlns:p14="http://schemas.microsoft.com/office/powerpoint/2010/main" val="1801883250"/>
-              </p:ext>
-            </p:extLst>
-          </p:nvPr>
-        </p:nvGraphicFramePr>
-        <p:xfrm>
-          <a:off x="3240825" y="1539657"/>
-          <a:ext cx="6412523" cy="434622"/>
-        </p:xfrm>
-        <a:graphic>
-          <a:graphicData uri="http://schemas.openxmlformats.org/drawingml/2006/table">
-            <a:tbl>
-              <a:tblPr firstRow="1" bandRow="1">
-                <a:tableStyleId>{F5AB1C69-6EDB-4FF4-983F-18BD219EF322}</a:tableStyleId>
-              </a:tblPr>
-              <a:tblGrid>
-                <a:gridCol w="6412523">
-                  <a:extLst>
-                    <a:ext uri="{9D8B030D-6E8A-4147-A177-3AD203B41FA5}">
-                      <a16:colId xmlns:a16="http://schemas.microsoft.com/office/drawing/2014/main" val="335546556"/>
-                    </a:ext>
-                  </a:extLst>
-                </a:gridCol>
-              </a:tblGrid>
-              <a:tr h="308522">
-                <a:tc>
-                  <a:txBody>
-                    <a:bodyPr/>
-                    <a:lstStyle/>
-                    <a:p>
-                      <a:pPr algn="ctr"/>
-                      <a:r>
-                        <a:rPr lang="es-PE" sz="1600" u="none" dirty="0"/>
-                        <a:t>TEMARIO</a:t>
-                      </a:r>
-                      <a:endParaRPr lang="es-PE" sz="1600" u="none" baseline="0" dirty="0">
-                        <a:latin typeface="Arial Black" panose="020B0A04020102020204" pitchFamily="34" charset="0"/>
-                      </a:endParaRPr>
-                    </a:p>
-                  </a:txBody>
-                  <a:tcPr marL="190782" marR="190782" marT="95391" marB="95391" anchor="ctr">
-                    <a:lnL w="12700" cap="flat" cmpd="sng" algn="ctr">
-                      <a:solidFill>
-                        <a:schemeClr val="tx1"/>
-                      </a:solidFill>
-                      <a:prstDash val="solid"/>
-                      <a:round/>
-                      <a:headEnd type="none" w="med" len="med"/>
-                      <a:tailEnd type="none" w="med" len="med"/>
-                    </a:lnL>
-                    <a:lnR w="12700" cap="flat" cmpd="sng" algn="ctr">
-                      <a:solidFill>
-                        <a:schemeClr val="tx1"/>
-                      </a:solidFill>
-                      <a:prstDash val="solid"/>
-                      <a:round/>
-                      <a:headEnd type="none" w="med" len="med"/>
-                      <a:tailEnd type="none" w="med" len="med"/>
-                    </a:lnR>
-                    <a:lnT w="12700" cap="flat" cmpd="sng" algn="ctr">
-                      <a:solidFill>
-                        <a:schemeClr val="tx1"/>
-                      </a:solidFill>
-                      <a:prstDash val="solid"/>
-                      <a:round/>
-                      <a:headEnd type="none" w="med" len="med"/>
-                      <a:tailEnd type="none" w="med" len="med"/>
-                    </a:lnT>
-                    <a:lnB w="12700" cap="flat" cmpd="sng" algn="ctr">
-                      <a:solidFill>
-                        <a:schemeClr val="tx1"/>
-                      </a:solidFill>
-                      <a:prstDash val="solid"/>
-                      <a:round/>
-                      <a:headEnd type="none" w="med" len="med"/>
-                      <a:tailEnd type="none" w="med" len="med"/>
-                    </a:lnB>
-                    <a:lnTlToBr w="12700" cmpd="sng">
-                      <a:noFill/>
-                      <a:prstDash val="solid"/>
-                    </a:lnTlToBr>
-                    <a:lnBlToTr w="12700" cmpd="sng">
-                      <a:noFill/>
-                      <a:prstDash val="solid"/>
-                    </a:lnBlToTr>
-                  </a:tcPr>
-                </a:tc>
-                <a:extLst>
-                  <a:ext uri="{0D108BD9-81ED-4DB2-BD59-A6C34878D82A}">
-                    <a16:rowId xmlns:a16="http://schemas.microsoft.com/office/drawing/2014/main" val="4034874865"/>
-                  </a:ext>
-                </a:extLst>
-              </a:tr>
-            </a:tbl>
-          </a:graphicData>
-        </a:graphic>
-      </p:graphicFrame>
-      <p:graphicFrame>
-        <p:nvGraphicFramePr>
-          <p:cNvPr id="29" name="Tabla 28"/>
-          <p:cNvGraphicFramePr>
-            <a:graphicFrameLocks noGrp="1"/>
-          </p:cNvGraphicFramePr>
-          <p:nvPr>
-            <p:extLst>
-              <p:ext uri="{D42A27DB-BD31-4B8C-83A1-F6EECF244321}">
-                <p14:modId xmlns:p14="http://schemas.microsoft.com/office/powerpoint/2010/main" val="1924746651"/>
-              </p:ext>
-            </p:extLst>
-          </p:nvPr>
-        </p:nvGraphicFramePr>
-        <p:xfrm>
-          <a:off x="3240826" y="1974652"/>
-          <a:ext cx="6412523" cy="2308131"/>
-        </p:xfrm>
-        <a:graphic>
-          <a:graphicData uri="http://schemas.openxmlformats.org/drawingml/2006/table">
-            <a:tbl>
-              <a:tblPr firstRow="1" bandRow="1">
-                <a:tableStyleId>{D7AC3CCA-C797-4891-BE02-D94E43425B78}</a:tableStyleId>
-              </a:tblPr>
-              <a:tblGrid>
-                <a:gridCol w="2867389">
-                  <a:extLst>
-                    <a:ext uri="{9D8B030D-6E8A-4147-A177-3AD203B41FA5}">
-                      <a16:colId xmlns:a16="http://schemas.microsoft.com/office/drawing/2014/main" val="3108834388"/>
-                    </a:ext>
-                  </a:extLst>
-                </a:gridCol>
-                <a:gridCol w="3545134">
-                  <a:extLst>
-                    <a:ext uri="{9D8B030D-6E8A-4147-A177-3AD203B41FA5}">
-                      <a16:colId xmlns:a16="http://schemas.microsoft.com/office/drawing/2014/main" val="1484549653"/>
-                    </a:ext>
-                  </a:extLst>
-                </a:gridCol>
-              </a:tblGrid>
-              <a:tr h="269517">
-                <a:tc>
-                  <a:txBody>
-                    <a:bodyPr/>
-                    <a:lstStyle/>
-                    <a:p>
-                      <a:pPr marL="0" algn="ctr" defTabSz="914400" rtl="0" eaLnBrk="1" latinLnBrk="0" hangingPunct="1"/>
-                      <a:r>
-                        <a:rPr lang="es-PE" sz="1150" b="0" kern="1200" dirty="0">
-                          <a:solidFill>
-                            <a:schemeClr val="dk1"/>
-                          </a:solidFill>
-                          <a:latin typeface="+mn-lt"/>
-                          <a:ea typeface="+mn-ea"/>
-                          <a:cs typeface="+mn-cs"/>
-                        </a:rPr>
-                        <a:t>MÓDULO I</a:t>
-                      </a:r>
-                      <a:endParaRPr lang="en-US" sz="1150" b="0" kern="1200" dirty="0">
-                        <a:solidFill>
-                          <a:schemeClr val="dk1"/>
-                        </a:solidFill>
-                        <a:latin typeface="+mn-lt"/>
-                        <a:ea typeface="+mn-ea"/>
-                        <a:cs typeface="+mn-cs"/>
-                      </a:endParaRPr>
-                    </a:p>
-                  </a:txBody>
-                  <a:tcPr anchor="ctr"/>
-                </a:tc>
-                <a:tc>
-                  <a:txBody>
-                    <a:bodyPr/>
-                    <a:lstStyle/>
-                    <a:p>
-                      <a:pPr algn="ctr"/>
-                      <a:r>
-                        <a:rPr lang="es-ES" sz="1150" b="0" i="0" kern="1200" dirty="0">
-                          <a:solidFill>
-                            <a:schemeClr val="dk1"/>
-                          </a:solidFill>
-                          <a:effectLst/>
-                          <a:latin typeface="+mn-lt"/>
-                          <a:ea typeface="+mn-ea"/>
-                          <a:cs typeface="+mn-cs"/>
-                        </a:rPr>
-                        <a:t>{{MODULO_1}}</a:t>
-                      </a:r>
-                    </a:p>
-                  </a:txBody>
-                  <a:tcPr anchor="ctr"/>
-                </a:tc>
-                <a:extLst>
-                  <a:ext uri="{0D108BD9-81ED-4DB2-BD59-A6C34878D82A}">
-                    <a16:rowId xmlns:a16="http://schemas.microsoft.com/office/drawing/2014/main" val="200180495"/>
-                  </a:ext>
-                </a:extLst>
-              </a:tr>
-              <a:tr h="269517">
-                <a:tc>
-                  <a:txBody>
-                    <a:bodyPr/>
-                    <a:lstStyle/>
-                    <a:p>
-                      <a:pPr marL="0" algn="ctr" defTabSz="914400" rtl="0" eaLnBrk="1" latinLnBrk="0" hangingPunct="1"/>
-                      <a:r>
-                        <a:rPr lang="es-PE" sz="1150" kern="1200" dirty="0">
-                          <a:solidFill>
-                            <a:schemeClr val="dk1"/>
-                          </a:solidFill>
-                          <a:latin typeface="+mn-lt"/>
-                          <a:ea typeface="+mn-ea"/>
-                          <a:cs typeface="+mn-cs"/>
-                        </a:rPr>
-                        <a:t>MÓDULO II</a:t>
-                      </a:r>
-                      <a:endParaRPr lang="en-US" sz="1150" kern="1200" dirty="0">
-                        <a:solidFill>
-                          <a:schemeClr val="dk1"/>
-                        </a:solidFill>
-                        <a:latin typeface="+mn-lt"/>
-                        <a:ea typeface="+mn-ea"/>
-                        <a:cs typeface="+mn-cs"/>
-                      </a:endParaRPr>
-                    </a:p>
-                  </a:txBody>
-                  <a:tcPr anchor="ctr"/>
-                </a:tc>
-                <a:tc>
-                  <a:txBody>
-                    <a:bodyPr/>
-                    <a:lstStyle/>
-                    <a:p>
-                      <a:pPr algn="ctr"/>
-                      <a:r>
-                        <a:rPr lang="es-ES" sz="1150" b="0" i="0" kern="1200" dirty="0">
-                          <a:solidFill>
-                            <a:schemeClr val="dk1"/>
-                          </a:solidFill>
-                          <a:effectLst/>
-                          <a:latin typeface="+mn-lt"/>
-                          <a:ea typeface="+mn-ea"/>
-                          <a:cs typeface="+mn-cs"/>
-                        </a:rPr>
-                        <a:t>{{MODULO_2}}</a:t>
-                      </a:r>
-                    </a:p>
-                  </a:txBody>
-                  <a:tcPr anchor="ctr"/>
-                </a:tc>
-                <a:extLst>
-                  <a:ext uri="{0D108BD9-81ED-4DB2-BD59-A6C34878D82A}">
-                    <a16:rowId xmlns:a16="http://schemas.microsoft.com/office/drawing/2014/main" val="3180852981"/>
-                  </a:ext>
-                </a:extLst>
-              </a:tr>
-              <a:tr h="400568">
-                <a:tc>
-                  <a:txBody>
-                    <a:bodyPr/>
-                    <a:lstStyle/>
-                    <a:p>
-                      <a:pPr marL="0" algn="ctr" defTabSz="914400" rtl="0" eaLnBrk="1" latinLnBrk="0" hangingPunct="1"/>
-                      <a:r>
-                        <a:rPr lang="es-PE" sz="1150" kern="1200" dirty="0">
-                          <a:solidFill>
-                            <a:schemeClr val="dk1"/>
-                          </a:solidFill>
-                          <a:latin typeface="+mn-lt"/>
-                          <a:ea typeface="+mn-ea"/>
-                          <a:cs typeface="+mn-cs"/>
-                        </a:rPr>
-                        <a:t>MÓDULO III</a:t>
-                      </a:r>
-                      <a:endParaRPr lang="en-US" sz="1150" kern="1200" dirty="0">
-                        <a:solidFill>
-                          <a:schemeClr val="dk1"/>
-                        </a:solidFill>
-                        <a:latin typeface="+mn-lt"/>
-                        <a:ea typeface="+mn-ea"/>
-                        <a:cs typeface="+mn-cs"/>
-                      </a:endParaRPr>
-                    </a:p>
-                  </a:txBody>
-                  <a:tcPr anchor="ctr"/>
-                </a:tc>
-                <a:tc>
-                  <a:txBody>
-                    <a:bodyPr/>
-                    <a:lstStyle/>
-                    <a:p>
-                      <a:pPr algn="ctr"/>
-                      <a:r>
-                        <a:rPr lang="es-ES" sz="1150" b="0" i="0" kern="1200" dirty="0">
-                          <a:solidFill>
-                            <a:schemeClr val="dk1"/>
-                          </a:solidFill>
-                          <a:effectLst/>
-                          <a:latin typeface="+mn-lt"/>
-                          <a:ea typeface="+mn-ea"/>
-                          <a:cs typeface="+mn-cs"/>
-                        </a:rPr>
-                        <a:t>{{MODULO_3}}</a:t>
-                      </a:r>
-                    </a:p>
-                  </a:txBody>
-                  <a:tcPr anchor="ctr"/>
-                </a:tc>
-                <a:extLst>
-                  <a:ext uri="{0D108BD9-81ED-4DB2-BD59-A6C34878D82A}">
-                    <a16:rowId xmlns:a16="http://schemas.microsoft.com/office/drawing/2014/main" val="4272501331"/>
-                  </a:ext>
-                </a:extLst>
-              </a:tr>
-              <a:tr h="294109">
-                <a:tc>
-                  <a:txBody>
-                    <a:bodyPr/>
-                    <a:lstStyle/>
-                    <a:p>
-                      <a:pPr marL="0" algn="ctr" defTabSz="914400" rtl="0" eaLnBrk="1" latinLnBrk="0" hangingPunct="1"/>
-                      <a:r>
-                        <a:rPr lang="es-PE" sz="1150" kern="1200" dirty="0">
-                          <a:solidFill>
-                            <a:schemeClr val="dk1"/>
-                          </a:solidFill>
-                          <a:latin typeface="+mn-lt"/>
-                          <a:ea typeface="+mn-ea"/>
-                          <a:cs typeface="+mn-cs"/>
-                        </a:rPr>
-                        <a:t>MÓDULO IV</a:t>
-                      </a:r>
-                      <a:endParaRPr lang="en-US" sz="1150" kern="1200" dirty="0">
-                        <a:solidFill>
-                          <a:schemeClr val="dk1"/>
-                        </a:solidFill>
-                        <a:latin typeface="+mn-lt"/>
-                        <a:ea typeface="+mn-ea"/>
-                        <a:cs typeface="+mn-cs"/>
-                      </a:endParaRPr>
-                    </a:p>
-                  </a:txBody>
-                  <a:tcPr anchor="ctr"/>
-                </a:tc>
-                <a:tc>
-                  <a:txBody>
-                    <a:bodyPr/>
-                    <a:lstStyle/>
-                    <a:p>
-                      <a:pPr algn="ctr"/>
-                      <a:r>
-                        <a:rPr lang="es-ES" sz="1150" b="0" i="0" kern="1200" dirty="0">
-                          <a:solidFill>
-                            <a:schemeClr val="dk1"/>
-                          </a:solidFill>
-                          <a:effectLst/>
-                          <a:latin typeface="+mn-lt"/>
-                          <a:ea typeface="+mn-ea"/>
-                          <a:cs typeface="+mn-cs"/>
-                        </a:rPr>
-                        <a:t>{{MODULO_4}}</a:t>
-                      </a:r>
-                    </a:p>
-                  </a:txBody>
-                  <a:tcPr anchor="ctr"/>
-                </a:tc>
-                <a:extLst>
-                  <a:ext uri="{0D108BD9-81ED-4DB2-BD59-A6C34878D82A}">
-                    <a16:rowId xmlns:a16="http://schemas.microsoft.com/office/drawing/2014/main" val="2661531471"/>
-                  </a:ext>
-                </a:extLst>
-              </a:tr>
-              <a:tr h="182174">
-                <a:tc>
-                  <a:txBody>
-                    <a:bodyPr/>
-                    <a:lstStyle/>
-                    <a:p>
-                      <a:pPr marL="0" algn="ctr" defTabSz="914400" rtl="0" eaLnBrk="1" latinLnBrk="0" hangingPunct="1"/>
-                      <a:r>
-                        <a:rPr lang="es-PE" sz="1150" kern="1200" dirty="0">
-                          <a:solidFill>
-                            <a:schemeClr val="dk1"/>
-                          </a:solidFill>
-                          <a:latin typeface="+mn-lt"/>
-                          <a:ea typeface="+mn-ea"/>
-                          <a:cs typeface="+mn-cs"/>
-                        </a:rPr>
-                        <a:t>MÓDULO V</a:t>
-                      </a:r>
-                      <a:endParaRPr lang="en-US" sz="1150" kern="1200" dirty="0">
-                        <a:solidFill>
-                          <a:schemeClr val="dk1"/>
-                        </a:solidFill>
-                        <a:latin typeface="+mn-lt"/>
-                        <a:ea typeface="+mn-ea"/>
-                        <a:cs typeface="+mn-cs"/>
-                      </a:endParaRPr>
-                    </a:p>
-                  </a:txBody>
-                  <a:tcPr anchor="ctr"/>
-                </a:tc>
-                <a:tc>
-                  <a:txBody>
-                    <a:bodyPr/>
-                    <a:lstStyle/>
-                    <a:p>
-                      <a:pPr algn="ctr"/>
-                      <a:r>
-                        <a:rPr lang="es-ES" sz="1150" b="0" i="0" kern="1200" dirty="0">
-                          <a:solidFill>
-                            <a:schemeClr val="dk1"/>
-                          </a:solidFill>
-                          <a:effectLst/>
-                          <a:latin typeface="+mn-lt"/>
-                          <a:ea typeface="+mn-ea"/>
-                          <a:cs typeface="+mn-cs"/>
-                        </a:rPr>
-                        <a:t>{{MODULO_5}}</a:t>
-                      </a:r>
-                    </a:p>
-                  </a:txBody>
-                  <a:tcPr anchor="ctr"/>
-                </a:tc>
-                <a:extLst>
-                  <a:ext uri="{0D108BD9-81ED-4DB2-BD59-A6C34878D82A}">
-                    <a16:rowId xmlns:a16="http://schemas.microsoft.com/office/drawing/2014/main" val="3024625614"/>
-                  </a:ext>
-                </a:extLst>
-              </a:tr>
-              <a:tr h="182174">
-                <a:tc>
-                  <a:txBody>
-                    <a:bodyPr/>
-                    <a:lstStyle/>
-                    <a:p>
-                      <a:pPr marL="0" algn="ctr" defTabSz="914400" rtl="0" eaLnBrk="1" latinLnBrk="0" hangingPunct="1"/>
-                      <a:r>
-                        <a:rPr lang="es-PE" sz="1150" kern="1200" dirty="0">
-                          <a:solidFill>
-                            <a:schemeClr val="dk1"/>
-                          </a:solidFill>
-                          <a:latin typeface="+mn-lt"/>
-                          <a:ea typeface="+mn-ea"/>
-                          <a:cs typeface="+mn-cs"/>
-                        </a:rPr>
-                        <a:t>MÓDULO VI</a:t>
-                      </a:r>
-                      <a:endParaRPr lang="en-US" sz="1150" kern="1200" dirty="0">
-                        <a:solidFill>
-                          <a:schemeClr val="dk1"/>
-                        </a:solidFill>
-                        <a:latin typeface="+mn-lt"/>
-                        <a:ea typeface="+mn-ea"/>
-                        <a:cs typeface="+mn-cs"/>
-                      </a:endParaRPr>
-                    </a:p>
-                  </a:txBody>
-                  <a:tcPr anchor="ctr"/>
-                </a:tc>
-                <a:tc>
-                  <a:txBody>
-                    <a:bodyPr/>
-                    <a:lstStyle/>
-                    <a:p>
-                      <a:pPr algn="ctr"/>
-                      <a:r>
-                        <a:rPr lang="es-ES" sz="1150" b="0" i="0" kern="1200" dirty="0">
-                          <a:solidFill>
-                            <a:schemeClr val="dk1"/>
-                          </a:solidFill>
-                          <a:effectLst/>
-                          <a:latin typeface="+mn-lt"/>
-                          <a:ea typeface="+mn-ea"/>
-                          <a:cs typeface="+mn-cs"/>
-                        </a:rPr>
-                        <a:t>{{MODULO_6}}</a:t>
-                      </a:r>
-                    </a:p>
-                  </a:txBody>
-                  <a:tcPr anchor="ctr"/>
-                </a:tc>
-                <a:extLst>
-                  <a:ext uri="{0D108BD9-81ED-4DB2-BD59-A6C34878D82A}">
-                    <a16:rowId xmlns:a16="http://schemas.microsoft.com/office/drawing/2014/main" val="4254236312"/>
-                  </a:ext>
-                </a:extLst>
-              </a:tr>
-              <a:tr h="182174">
-                <a:tc>
-                  <a:txBody>
-                    <a:bodyPr/>
-                    <a:lstStyle/>
-                    <a:p>
-                      <a:pPr marL="0" algn="ctr" defTabSz="914400" rtl="0" eaLnBrk="1" latinLnBrk="0" hangingPunct="1"/>
-                      <a:r>
-                        <a:rPr lang="es-PE" sz="1150" kern="1200" dirty="0">
-                          <a:solidFill>
-                            <a:schemeClr val="dk1"/>
-                          </a:solidFill>
-                          <a:latin typeface="+mn-lt"/>
-                          <a:ea typeface="+mn-ea"/>
-                          <a:cs typeface="+mn-cs"/>
-                        </a:rPr>
-                        <a:t>MÓDULO VII</a:t>
-                      </a:r>
-                      <a:endParaRPr lang="en-US" sz="1150" kern="1200" dirty="0">
-                        <a:solidFill>
-                          <a:schemeClr val="dk1"/>
-                        </a:solidFill>
-                        <a:latin typeface="+mn-lt"/>
-                        <a:ea typeface="+mn-ea"/>
-                        <a:cs typeface="+mn-cs"/>
-                      </a:endParaRPr>
-                    </a:p>
-                  </a:txBody>
-                  <a:tcPr anchor="ctr"/>
-                </a:tc>
-                <a:tc>
-                  <a:txBody>
-                    <a:bodyPr/>
-                    <a:lstStyle/>
-                    <a:p>
-                      <a:pPr algn="ctr"/>
-                      <a:r>
-                        <a:rPr lang="es-ES" sz="1150" b="0" i="0" kern="1200" dirty="0">
-                          <a:solidFill>
-                            <a:schemeClr val="dk1"/>
-                          </a:solidFill>
-                          <a:effectLst/>
-                          <a:latin typeface="+mn-lt"/>
-                          <a:ea typeface="+mn-ea"/>
-                          <a:cs typeface="+mn-cs"/>
-                        </a:rPr>
-                        <a:t>{{MODULO_7}}</a:t>
-                      </a:r>
-                    </a:p>
-                  </a:txBody>
-                  <a:tcPr anchor="ctr"/>
-                </a:tc>
-                <a:extLst>
-                  <a:ext uri="{0D108BD9-81ED-4DB2-BD59-A6C34878D82A}">
-                    <a16:rowId xmlns:a16="http://schemas.microsoft.com/office/drawing/2014/main" val="2174920499"/>
-                  </a:ext>
-                </a:extLst>
-              </a:tr>
-              <a:tr h="182174">
-                <a:tc>
-                  <a:txBody>
-                    <a:bodyPr/>
-                    <a:lstStyle/>
-                    <a:p>
-                      <a:pPr marL="0" marR="0" lvl="0" indent="0" algn="ctr" defTabSz="914400" rtl="0" eaLnBrk="1" fontAlgn="auto" latinLnBrk="0" hangingPunct="1">
-                        <a:lnSpc>
-                          <a:spcPct val="100000"/>
-                        </a:lnSpc>
-                        <a:spcBef>
-                          <a:spcPts val="0"/>
-                        </a:spcBef>
-                        <a:spcAft>
-                          <a:spcPts val="0"/>
-                        </a:spcAft>
-                        <a:buClrTx/>
-                        <a:buSzTx/>
-                        <a:buFontTx/>
-                        <a:buNone/>
-                        <a:tabLst/>
-                        <a:defRPr/>
-                      </a:pPr>
-                      <a:r>
-                        <a:rPr lang="es-PE" sz="1200" kern="1200" dirty="0">
-                          <a:solidFill>
-                            <a:schemeClr val="dk1"/>
-                          </a:solidFill>
-                          <a:latin typeface="+mn-lt"/>
-                          <a:ea typeface="+mn-ea"/>
-                          <a:cs typeface="+mn-cs"/>
-                        </a:rPr>
-                        <a:t>MÓDULO VII</a:t>
-                      </a:r>
-                      <a:r>
-                        <a:rPr lang="en-US" sz="1200" kern="1200" dirty="0">
-                          <a:solidFill>
-                            <a:schemeClr val="dk1"/>
-                          </a:solidFill>
-                          <a:latin typeface="+mn-lt"/>
-                          <a:ea typeface="+mn-ea"/>
-                          <a:cs typeface="+mn-cs"/>
-                        </a:rPr>
-                        <a:t>I</a:t>
-                      </a:r>
-                    </a:p>
-                  </a:txBody>
-                  <a:tcPr anchor="ctr"/>
-                </a:tc>
-                <a:tc>
-                  <a:txBody>
-                    <a:bodyPr/>
-                    <a:lstStyle/>
-                    <a:p>
-                      <a:pPr algn="ctr"/>
-                      <a:r>
-                        <a:rPr lang="es-ES" sz="1200" b="0" i="0" kern="1200" dirty="0">
-                          <a:solidFill>
-                            <a:schemeClr val="dk1"/>
-                          </a:solidFill>
-                          <a:effectLst/>
-                          <a:latin typeface="+mn-lt"/>
-                          <a:ea typeface="+mn-ea"/>
-                          <a:cs typeface="+mn-cs"/>
-                        </a:rPr>
-                        <a:t>{{MODULO_8}}</a:t>
-                      </a:r>
-                    </a:p>
-                  </a:txBody>
-                  <a:tcPr anchor="ctr"/>
-                </a:tc>
-                <a:extLst>
-                  <a:ext uri="{0D108BD9-81ED-4DB2-BD59-A6C34878D82A}">
-                    <a16:rowId xmlns:a16="http://schemas.microsoft.com/office/drawing/2014/main" val="1021187121"/>
-                  </a:ext>
-                </a:extLst>
-              </a:tr>
-            </a:tbl>
-          </a:graphicData>
-        </a:graphic>
-      </p:graphicFrame>
-      <p:sp>
-        <p:nvSpPr>
-          <p:cNvPr id="2" name="CuadroTexto 1">
+      <p:sp>
+        <p:nvSpPr>
+          <p:cNvPr id="11" name="CuadroTexto 10">
             <a:extLst>
               <a:ext uri="{FF2B5EF4-FFF2-40B4-BE49-F238E27FC236}">
-                <a16:creationId xmlns:a16="http://schemas.microsoft.com/office/drawing/2014/main" id="{759F48FB-FD35-13D0-18BC-30EB95AF4351}"/>
+                <a16:creationId xmlns:a16="http://schemas.microsoft.com/office/drawing/2014/main" id="{F5C7B1FD-AB74-C6FD-CB78-2EFDC3461E8B}"/>
               </a:ext>
             </a:extLst>
           </p:cNvPr>
@@ -5244,7 +5292,7 @@
         </p:nvSpPr>
         <p:spPr>
           <a:xfrm>
-            <a:off x="1113988" y="5089855"/>
+            <a:off x="1255776" y="4659232"/>
             <a:ext cx="1397690" cy="369332"/>
           </a:xfrm>
           <a:prstGeom prst="rect">
@@ -5352,9 +5400,74 @@
             </a:lvl9pPr>
           </a:lstStyle>
           <a:p>
+            <a:pPr algn="ctr"/>
             <a:r>
               <a:rPr lang="es-PE" dirty="0"/>
               <a:t>{{QR_CODE}}</a:t>
+            </a:r>
+          </a:p>
+        </p:txBody>
+      </p:sp>
+      <p:sp>
+        <p:nvSpPr>
+          <p:cNvPr id="2" name="Rectángulo 1">
+            <a:extLst>
+              <a:ext uri="{FF2B5EF4-FFF2-40B4-BE49-F238E27FC236}">
+                <a16:creationId xmlns:a16="http://schemas.microsoft.com/office/drawing/2014/main" id="{203C07B9-9B5A-A44E-7071-61CDFCCF4674}"/>
+              </a:ext>
+            </a:extLst>
+          </p:cNvPr>
+          <p:cNvSpPr/>
+          <p:nvPr/>
+        </p:nvSpPr>
+        <p:spPr>
+          <a:xfrm>
+            <a:off x="684240" y="5727842"/>
+            <a:ext cx="2130198" cy="366767"/>
+          </a:xfrm>
+          <a:prstGeom prst="rect">
+            <a:avLst/>
+          </a:prstGeom>
+        </p:spPr>
+        <p:txBody>
+          <a:bodyPr wrap="square">
+            <a:spAutoFit/>
+          </a:bodyPr>
+          <a:lstStyle/>
+          <a:p>
+            <a:pPr lvl="0" algn="ctr">
+              <a:spcBef>
+                <a:spcPts val="59"/>
+              </a:spcBef>
+            </a:pPr>
+            <a:r>
+              <a:rPr lang="es-PE" sz="900" dirty="0">
+                <a:solidFill>
+                  <a:prstClr val="black"/>
+                </a:solidFill>
+                <a:latin typeface="Times New Roman" panose="02020603050405020304" pitchFamily="18" charset="0"/>
+                <a:ea typeface="Cambria Math" panose="02040503050406030204" pitchFamily="18" charset="0"/>
+                <a:cs typeface="Times New Roman" panose="02020603050405020304" pitchFamily="18" charset="0"/>
+              </a:rPr>
+              <a:t>CÓDIGO ESTUDIANTE:</a:t>
+            </a:r>
+          </a:p>
+          <a:p>
+            <a:pPr algn="ctr">
+              <a:spcBef>
+                <a:spcPts val="59"/>
+              </a:spcBef>
+            </a:pPr>
+            <a:r>
+              <a:rPr lang="en-US" sz="800" b="1" dirty="0">
+                <a:solidFill>
+                  <a:prstClr val="black"/>
+                </a:solidFill>
+                <a:latin typeface="Times New Roman" panose="02020603050405020304" pitchFamily="18" charset="0"/>
+                <a:ea typeface="Cambria Math" panose="02040503050406030204" pitchFamily="18" charset="0"/>
+                <a:cs typeface="Times New Roman" panose="02020603050405020304" pitchFamily="18" charset="0"/>
+              </a:rPr>
+              <a:t>{{CODE_STUDENT}}</a:t>
             </a:r>
           </a:p>
         </p:txBody>
